--- a/Unit-1(A)(1).pptx
+++ b/Unit-1(A)(1).pptx
@@ -5,7 +5,7 @@
     <p:sldMasterId id="2147483648" r:id="rId1"/>
   </p:sldMasterIdLst>
   <p:notesMasterIdLst>
-    <p:notesMasterId r:id="rId64"/>
+    <p:notesMasterId r:id="rId67"/>
   </p:notesMasterIdLst>
   <p:sldIdLst>
     <p:sldId id="256" r:id="rId2"/>
@@ -28,48 +28,51 @@
     <p:sldId id="271" r:id="rId19"/>
     <p:sldId id="272" r:id="rId20"/>
     <p:sldId id="273" r:id="rId21"/>
-    <p:sldId id="276" r:id="rId22"/>
-    <p:sldId id="277" r:id="rId23"/>
-    <p:sldId id="278" r:id="rId24"/>
-    <p:sldId id="279" r:id="rId25"/>
-    <p:sldId id="280" r:id="rId26"/>
-    <p:sldId id="281" r:id="rId27"/>
-    <p:sldId id="282" r:id="rId28"/>
-    <p:sldId id="283" r:id="rId29"/>
-    <p:sldId id="284" r:id="rId30"/>
-    <p:sldId id="285" r:id="rId31"/>
-    <p:sldId id="286" r:id="rId32"/>
-    <p:sldId id="287" r:id="rId33"/>
-    <p:sldId id="296" r:id="rId34"/>
-    <p:sldId id="297" r:id="rId35"/>
-    <p:sldId id="298" r:id="rId36"/>
-    <p:sldId id="288" r:id="rId37"/>
-    <p:sldId id="300" r:id="rId38"/>
-    <p:sldId id="289" r:id="rId39"/>
-    <p:sldId id="299" r:id="rId40"/>
-    <p:sldId id="290" r:id="rId41"/>
-    <p:sldId id="308" r:id="rId42"/>
-    <p:sldId id="291" r:id="rId43"/>
-    <p:sldId id="292" r:id="rId44"/>
-    <p:sldId id="293" r:id="rId45"/>
-    <p:sldId id="294" r:id="rId46"/>
-    <p:sldId id="295" r:id="rId47"/>
-    <p:sldId id="301" r:id="rId48"/>
-    <p:sldId id="302" r:id="rId49"/>
-    <p:sldId id="303" r:id="rId50"/>
-    <p:sldId id="304" r:id="rId51"/>
-    <p:sldId id="305" r:id="rId52"/>
-    <p:sldId id="306" r:id="rId53"/>
-    <p:sldId id="307" r:id="rId54"/>
-    <p:sldId id="309" r:id="rId55"/>
-    <p:sldId id="310" r:id="rId56"/>
-    <p:sldId id="311" r:id="rId57"/>
-    <p:sldId id="312" r:id="rId58"/>
-    <p:sldId id="313" r:id="rId59"/>
-    <p:sldId id="314" r:id="rId60"/>
-    <p:sldId id="315" r:id="rId61"/>
-    <p:sldId id="316" r:id="rId62"/>
-    <p:sldId id="317" r:id="rId63"/>
+    <p:sldId id="330" r:id="rId22"/>
+    <p:sldId id="331" r:id="rId23"/>
+    <p:sldId id="332" r:id="rId24"/>
+    <p:sldId id="276" r:id="rId25"/>
+    <p:sldId id="277" r:id="rId26"/>
+    <p:sldId id="278" r:id="rId27"/>
+    <p:sldId id="279" r:id="rId28"/>
+    <p:sldId id="280" r:id="rId29"/>
+    <p:sldId id="281" r:id="rId30"/>
+    <p:sldId id="282" r:id="rId31"/>
+    <p:sldId id="283" r:id="rId32"/>
+    <p:sldId id="284" r:id="rId33"/>
+    <p:sldId id="285" r:id="rId34"/>
+    <p:sldId id="286" r:id="rId35"/>
+    <p:sldId id="287" r:id="rId36"/>
+    <p:sldId id="296" r:id="rId37"/>
+    <p:sldId id="297" r:id="rId38"/>
+    <p:sldId id="298" r:id="rId39"/>
+    <p:sldId id="288" r:id="rId40"/>
+    <p:sldId id="300" r:id="rId41"/>
+    <p:sldId id="289" r:id="rId42"/>
+    <p:sldId id="299" r:id="rId43"/>
+    <p:sldId id="290" r:id="rId44"/>
+    <p:sldId id="308" r:id="rId45"/>
+    <p:sldId id="291" r:id="rId46"/>
+    <p:sldId id="292" r:id="rId47"/>
+    <p:sldId id="293" r:id="rId48"/>
+    <p:sldId id="294" r:id="rId49"/>
+    <p:sldId id="295" r:id="rId50"/>
+    <p:sldId id="301" r:id="rId51"/>
+    <p:sldId id="302" r:id="rId52"/>
+    <p:sldId id="303" r:id="rId53"/>
+    <p:sldId id="304" r:id="rId54"/>
+    <p:sldId id="305" r:id="rId55"/>
+    <p:sldId id="306" r:id="rId56"/>
+    <p:sldId id="307" r:id="rId57"/>
+    <p:sldId id="309" r:id="rId58"/>
+    <p:sldId id="310" r:id="rId59"/>
+    <p:sldId id="311" r:id="rId60"/>
+    <p:sldId id="312" r:id="rId61"/>
+    <p:sldId id="313" r:id="rId62"/>
+    <p:sldId id="314" r:id="rId63"/>
+    <p:sldId id="315" r:id="rId64"/>
+    <p:sldId id="316" r:id="rId65"/>
+    <p:sldId id="317" r:id="rId66"/>
   </p:sldIdLst>
   <p:sldSz cx="9144000" cy="6858000" type="screen4x3"/>
   <p:notesSz cx="6858000" cy="9144000"/>
@@ -269,7 +272,7 @@
           <a:p>
             <a:fld id="{F283DE5A-2B1B-4FBF-955D-E66B7DBD6151}" type="datetimeFigureOut">
               <a:rPr lang="en-IN" smtClean="0"/>
-              <a:t>04-07-2026</a:t>
+              <a:t>06-07-2026</a:t>
             </a:fld>
             <a:endParaRPr lang="en-IN"/>
           </a:p>
@@ -885,7 +888,7 @@
             <a:fld id="{1D8BD707-D9CF-40AE-B4C6-C98DA3205C09}" type="datetimeFigureOut">
               <a:rPr lang="en-US" smtClean="0"/>
               <a:pPr/>
-              <a:t>7/4/2026</a:t>
+              <a:t>7/6/2026</a:t>
             </a:fld>
             <a:endParaRPr lang="en-US"/>
           </a:p>
@@ -1050,7 +1053,7 @@
             <a:fld id="{1D8BD707-D9CF-40AE-B4C6-C98DA3205C09}" type="datetimeFigureOut">
               <a:rPr lang="en-US" smtClean="0"/>
               <a:pPr/>
-              <a:t>7/4/2026</a:t>
+              <a:t>7/6/2026</a:t>
             </a:fld>
             <a:endParaRPr lang="en-US"/>
           </a:p>
@@ -1225,7 +1228,7 @@
             <a:fld id="{1D8BD707-D9CF-40AE-B4C6-C98DA3205C09}" type="datetimeFigureOut">
               <a:rPr lang="en-US" smtClean="0"/>
               <a:pPr/>
-              <a:t>7/4/2026</a:t>
+              <a:t>7/6/2026</a:t>
             </a:fld>
             <a:endParaRPr lang="en-US"/>
           </a:p>
@@ -1390,7 +1393,7 @@
             <a:fld id="{1D8BD707-D9CF-40AE-B4C6-C98DA3205C09}" type="datetimeFigureOut">
               <a:rPr lang="en-US" smtClean="0"/>
               <a:pPr/>
-              <a:t>7/4/2026</a:t>
+              <a:t>7/6/2026</a:t>
             </a:fld>
             <a:endParaRPr lang="en-US"/>
           </a:p>
@@ -1632,7 +1635,7 @@
             <a:fld id="{1D8BD707-D9CF-40AE-B4C6-C98DA3205C09}" type="datetimeFigureOut">
               <a:rPr lang="en-US" smtClean="0"/>
               <a:pPr/>
-              <a:t>7/4/2026</a:t>
+              <a:t>7/6/2026</a:t>
             </a:fld>
             <a:endParaRPr lang="en-US"/>
           </a:p>
@@ -1914,7 +1917,7 @@
             <a:fld id="{1D8BD707-D9CF-40AE-B4C6-C98DA3205C09}" type="datetimeFigureOut">
               <a:rPr lang="en-US" smtClean="0"/>
               <a:pPr/>
-              <a:t>7/4/2026</a:t>
+              <a:t>7/6/2026</a:t>
             </a:fld>
             <a:endParaRPr lang="en-US"/>
           </a:p>
@@ -2330,7 +2333,7 @@
             <a:fld id="{1D8BD707-D9CF-40AE-B4C6-C98DA3205C09}" type="datetimeFigureOut">
               <a:rPr lang="en-US" smtClean="0"/>
               <a:pPr/>
-              <a:t>7/4/2026</a:t>
+              <a:t>7/6/2026</a:t>
             </a:fld>
             <a:endParaRPr lang="en-US"/>
           </a:p>
@@ -2444,7 +2447,7 @@
             <a:fld id="{1D8BD707-D9CF-40AE-B4C6-C98DA3205C09}" type="datetimeFigureOut">
               <a:rPr lang="en-US" smtClean="0"/>
               <a:pPr/>
-              <a:t>7/4/2026</a:t>
+              <a:t>7/6/2026</a:t>
             </a:fld>
             <a:endParaRPr lang="en-US"/>
           </a:p>
@@ -2536,7 +2539,7 @@
             <a:fld id="{1D8BD707-D9CF-40AE-B4C6-C98DA3205C09}" type="datetimeFigureOut">
               <a:rPr lang="en-US" smtClean="0"/>
               <a:pPr/>
-              <a:t>7/4/2026</a:t>
+              <a:t>7/6/2026</a:t>
             </a:fld>
             <a:endParaRPr lang="en-US"/>
           </a:p>
@@ -2808,7 +2811,7 @@
             <a:fld id="{1D8BD707-D9CF-40AE-B4C6-C98DA3205C09}" type="datetimeFigureOut">
               <a:rPr lang="en-US" smtClean="0"/>
               <a:pPr/>
-              <a:t>7/4/2026</a:t>
+              <a:t>7/6/2026</a:t>
             </a:fld>
             <a:endParaRPr lang="en-US"/>
           </a:p>
@@ -3057,7 +3060,7 @@
             <a:fld id="{1D8BD707-D9CF-40AE-B4C6-C98DA3205C09}" type="datetimeFigureOut">
               <a:rPr lang="en-US" smtClean="0"/>
               <a:pPr/>
-              <a:t>7/4/2026</a:t>
+              <a:t>7/6/2026</a:t>
             </a:fld>
             <a:endParaRPr lang="en-US"/>
           </a:p>
@@ -3265,7 +3268,7 @@
             <a:fld id="{1D8BD707-D9CF-40AE-B4C6-C98DA3205C09}" type="datetimeFigureOut">
               <a:rPr lang="en-US" smtClean="0"/>
               <a:pPr/>
-              <a:t>7/4/2026</a:t>
+              <a:t>7/6/2026</a:t>
             </a:fld>
             <a:endParaRPr lang="en-US"/>
           </a:p>
@@ -5613,6 +5616,264 @@
   <p:cSld>
     <p:spTree>
       <p:nvGrpSpPr>
+        <p:cNvPr id="1" name="">
+          <a:extLst>
+            <a:ext uri="{FF2B5EF4-FFF2-40B4-BE49-F238E27FC236}">
+              <a16:creationId xmlns:a16="http://schemas.microsoft.com/office/drawing/2014/main" id="{E652A672-3BD8-3BCB-9A6E-E6D5056FCA57}"/>
+            </a:ext>
+          </a:extLst>
+        </p:cNvPr>
+        <p:cNvGrpSpPr/>
+        <p:nvPr/>
+      </p:nvGrpSpPr>
+      <p:grpSpPr>
+        <a:xfrm>
+          <a:off x="0" y="0"/>
+          <a:ext cx="0" cy="0"/>
+          <a:chOff x="0" y="0"/>
+          <a:chExt cx="0" cy="0"/>
+        </a:xfrm>
+      </p:grpSpPr>
+      <p:sp>
+        <p:nvSpPr>
+          <p:cNvPr id="2" name="Rectangle 1">
+            <a:extLst>
+              <a:ext uri="{FF2B5EF4-FFF2-40B4-BE49-F238E27FC236}">
+                <a16:creationId xmlns:a16="http://schemas.microsoft.com/office/drawing/2014/main" id="{561B702D-2202-390A-EC2A-0FE832DD3331}"/>
+              </a:ext>
+            </a:extLst>
+          </p:cNvPr>
+          <p:cNvSpPr/>
+          <p:nvPr/>
+        </p:nvSpPr>
+        <p:spPr>
+          <a:xfrm>
+            <a:off x="152400" y="152400"/>
+            <a:ext cx="8839200" cy="3170099"/>
+          </a:xfrm>
+          <a:prstGeom prst="rect">
+            <a:avLst/>
+          </a:prstGeom>
+        </p:spPr>
+        <p:txBody>
+          <a:bodyPr wrap="square">
+            <a:spAutoFit/>
+          </a:bodyPr>
+          <a:lstStyle/>
+          <a:p>
+            <a:pPr algn="ctr"/>
+            <a:r>
+              <a:rPr lang="en-IN" sz="3200" dirty="0">
+                <a:solidFill>
+                  <a:srgbClr val="FF0000"/>
+                </a:solidFill>
+              </a:rPr>
+              <a:t>Data Warehouse Modelling</a:t>
+            </a:r>
+            <a:endParaRPr lang="en-IN" dirty="0">
+              <a:solidFill>
+                <a:srgbClr val="FF0000"/>
+              </a:solidFill>
+            </a:endParaRPr>
+          </a:p>
+          <a:p>
+            <a:pPr fontAlgn="base"/>
+            <a:r>
+              <a:rPr lang="en-IN" sz="2400" dirty="0"/>
+              <a:t>A data cube (or OLAP cube) is </a:t>
+            </a:r>
+            <a:r>
+              <a:rPr lang="en-IN" sz="2400" dirty="0">
+                <a:solidFill>
+                  <a:srgbClr val="FF0000"/>
+                </a:solidFill>
+              </a:rPr>
+              <a:t>a multi-dimensional data structure used in business intelligence and data warehousing for rapid, interactive analysis.</a:t>
+            </a:r>
+            <a:r>
+              <a:rPr lang="en-IN" sz="2400" dirty="0"/>
+              <a:t> It organizes </a:t>
+            </a:r>
+            <a:r>
+              <a:rPr lang="en-IN" sz="2400" dirty="0">
+                <a:highlight>
+                  <a:srgbClr val="FFFF00"/>
+                </a:highlight>
+              </a:rPr>
+              <a:t>metrics</a:t>
+            </a:r>
+            <a:r>
+              <a:rPr lang="en-IN" sz="2400" dirty="0"/>
+              <a:t> (facts) along different categories </a:t>
+            </a:r>
+            <a:r>
+              <a:rPr lang="en-IN" sz="2400" dirty="0">
+                <a:highlight>
+                  <a:srgbClr val="FFFF00"/>
+                </a:highlight>
+              </a:rPr>
+              <a:t>(dimensions</a:t>
+            </a:r>
+            <a:r>
+              <a:rPr lang="en-IN" sz="2400" dirty="0"/>
+              <a:t>)—like time, product, and location—allowing users to effortlessly aggregate, slice, and view data from multiple perspectives. </a:t>
+            </a:r>
+          </a:p>
+          <a:p>
+            <a:pPr fontAlgn="base"/>
+            <a:r>
+              <a:rPr lang="en-IN" sz="2400" dirty="0">
+                <a:solidFill>
+                  <a:srgbClr val="FF0000"/>
+                </a:solidFill>
+              </a:rPr>
+              <a:t>Grouping of data in a multidimensional matrix is called data cubes.</a:t>
+            </a:r>
+            <a:r>
+              <a:rPr lang="en-IN" sz="2400" dirty="0"/>
+              <a:t> In</a:t>
+            </a:r>
+          </a:p>
+        </p:txBody>
+      </p:sp>
+    </p:spTree>
+    <p:extLst>
+      <p:ext uri="{BB962C8B-B14F-4D97-AF65-F5344CB8AC3E}">
+        <p14:creationId xmlns:p14="http://schemas.microsoft.com/office/powerpoint/2010/main" val="459458364"/>
+      </p:ext>
+    </p:extLst>
+  </p:cSld>
+  <p:clrMapOvr>
+    <a:masterClrMapping/>
+  </p:clrMapOvr>
+</p:sld>
+</file>
+
+<file path=ppt/slides/slide22.xml><?xml version="1.0" encoding="utf-8"?>
+<p:sld xmlns:a="http://schemas.openxmlformats.org/drawingml/2006/main" xmlns:r="http://schemas.openxmlformats.org/officeDocument/2006/relationships" xmlns:p="http://schemas.openxmlformats.org/presentationml/2006/main">
+  <p:cSld>
+    <p:spTree>
+      <p:nvGrpSpPr>
+        <p:cNvPr id="1" name=""/>
+        <p:cNvGrpSpPr/>
+        <p:nvPr/>
+      </p:nvGrpSpPr>
+      <p:grpSpPr>
+        <a:xfrm>
+          <a:off x="0" y="0"/>
+          <a:ext cx="0" cy="0"/>
+          <a:chOff x="0" y="0"/>
+          <a:chExt cx="0" cy="0"/>
+        </a:xfrm>
+      </p:grpSpPr>
+      <p:pic>
+        <p:nvPicPr>
+          <p:cNvPr id="3" name="Picture 2">
+            <a:extLst>
+              <a:ext uri="{FF2B5EF4-FFF2-40B4-BE49-F238E27FC236}">
+                <a16:creationId xmlns:a16="http://schemas.microsoft.com/office/drawing/2014/main" id="{2BCC5862-9A5E-519D-30DC-8267BA8069D7}"/>
+              </a:ext>
+            </a:extLst>
+          </p:cNvPr>
+          <p:cNvPicPr>
+            <a:picLocks noChangeAspect="1"/>
+          </p:cNvPicPr>
+          <p:nvPr/>
+        </p:nvPicPr>
+        <p:blipFill>
+          <a:blip r:embed="rId2"/>
+          <a:stretch>
+            <a:fillRect/>
+          </a:stretch>
+        </p:blipFill>
+        <p:spPr>
+          <a:xfrm>
+            <a:off x="1447800" y="609600"/>
+            <a:ext cx="6762750" cy="4438650"/>
+          </a:xfrm>
+          <a:prstGeom prst="rect">
+            <a:avLst/>
+          </a:prstGeom>
+        </p:spPr>
+      </p:pic>
+    </p:spTree>
+    <p:extLst>
+      <p:ext uri="{BB962C8B-B14F-4D97-AF65-F5344CB8AC3E}">
+        <p14:creationId xmlns:p14="http://schemas.microsoft.com/office/powerpoint/2010/main" val="310517393"/>
+      </p:ext>
+    </p:extLst>
+  </p:cSld>
+  <p:clrMapOvr>
+    <a:masterClrMapping/>
+  </p:clrMapOvr>
+</p:sld>
+</file>
+
+<file path=ppt/slides/slide23.xml><?xml version="1.0" encoding="utf-8"?>
+<p:sld xmlns:a="http://schemas.openxmlformats.org/drawingml/2006/main" xmlns:r="http://schemas.openxmlformats.org/officeDocument/2006/relationships" xmlns:p="http://schemas.openxmlformats.org/presentationml/2006/main">
+  <p:cSld>
+    <p:spTree>
+      <p:nvGrpSpPr>
+        <p:cNvPr id="1" name=""/>
+        <p:cNvGrpSpPr/>
+        <p:nvPr/>
+      </p:nvGrpSpPr>
+      <p:grpSpPr>
+        <a:xfrm>
+          <a:off x="0" y="0"/>
+          <a:ext cx="0" cy="0"/>
+          <a:chOff x="0" y="0"/>
+          <a:chExt cx="0" cy="0"/>
+        </a:xfrm>
+      </p:grpSpPr>
+      <p:pic>
+        <p:nvPicPr>
+          <p:cNvPr id="3" name="Picture 2">
+            <a:extLst>
+              <a:ext uri="{FF2B5EF4-FFF2-40B4-BE49-F238E27FC236}">
+                <a16:creationId xmlns:a16="http://schemas.microsoft.com/office/drawing/2014/main" id="{AAAA3729-754A-3B73-E029-1C2218C0D18B}"/>
+              </a:ext>
+            </a:extLst>
+          </p:cNvPr>
+          <p:cNvPicPr>
+            <a:picLocks noChangeAspect="1"/>
+          </p:cNvPicPr>
+          <p:nvPr/>
+        </p:nvPicPr>
+        <p:blipFill>
+          <a:blip r:embed="rId2"/>
+          <a:stretch>
+            <a:fillRect/>
+          </a:stretch>
+        </p:blipFill>
+        <p:spPr>
+          <a:xfrm>
+            <a:off x="1366837" y="1633537"/>
+            <a:ext cx="6410325" cy="4081463"/>
+          </a:xfrm>
+          <a:prstGeom prst="rect">
+            <a:avLst/>
+          </a:prstGeom>
+        </p:spPr>
+      </p:pic>
+    </p:spTree>
+    <p:extLst>
+      <p:ext uri="{BB962C8B-B14F-4D97-AF65-F5344CB8AC3E}">
+        <p14:creationId xmlns:p14="http://schemas.microsoft.com/office/powerpoint/2010/main" val="3092078296"/>
+      </p:ext>
+    </p:extLst>
+  </p:cSld>
+  <p:clrMapOvr>
+    <a:masterClrMapping/>
+  </p:clrMapOvr>
+</p:sld>
+</file>
+
+<file path=ppt/slides/slide24.xml><?xml version="1.0" encoding="utf-8"?>
+<p:sld xmlns:a="http://schemas.openxmlformats.org/drawingml/2006/main" xmlns:r="http://schemas.openxmlformats.org/officeDocument/2006/relationships" xmlns:p="http://schemas.openxmlformats.org/presentationml/2006/main">
+  <p:cSld>
+    <p:spTree>
+      <p:nvGrpSpPr>
         <p:cNvPr id="1" name=""/>
         <p:cNvGrpSpPr/>
         <p:nvPr/>
@@ -5764,7 +6025,7 @@
 </p:sld>
 </file>
 
-<file path=ppt/slides/slide22.xml><?xml version="1.0" encoding="utf-8"?>
+<file path=ppt/slides/slide25.xml><?xml version="1.0" encoding="utf-8"?>
 <p:sld xmlns:a="http://schemas.openxmlformats.org/drawingml/2006/main" xmlns:r="http://schemas.openxmlformats.org/officeDocument/2006/relationships" xmlns:p="http://schemas.openxmlformats.org/presentationml/2006/main">
   <p:cSld>
     <p:spTree>
@@ -5826,7 +6087,7 @@
 </p:sld>
 </file>
 
-<file path=ppt/slides/slide23.xml><?xml version="1.0" encoding="utf-8"?>
+<file path=ppt/slides/slide26.xml><?xml version="1.0" encoding="utf-8"?>
 <p:sld xmlns:a="http://schemas.openxmlformats.org/drawingml/2006/main" xmlns:r="http://schemas.openxmlformats.org/officeDocument/2006/relationships" xmlns:p="http://schemas.openxmlformats.org/presentationml/2006/main">
   <p:cSld>
     <p:spTree>
@@ -5942,7 +6203,7 @@
 </p:sld>
 </file>
 
-<file path=ppt/slides/slide24.xml><?xml version="1.0" encoding="utf-8"?>
+<file path=ppt/slides/slide27.xml><?xml version="1.0" encoding="utf-8"?>
 <p:sld xmlns:a="http://schemas.openxmlformats.org/drawingml/2006/main" xmlns:r="http://schemas.openxmlformats.org/officeDocument/2006/relationships" xmlns:p="http://schemas.openxmlformats.org/presentationml/2006/main">
   <p:cSld>
     <p:spTree>
@@ -10747,7 +11008,7 @@
 </p:sld>
 </file>
 
-<file path=ppt/slides/slide25.xml><?xml version="1.0" encoding="utf-8"?>
+<file path=ppt/slides/slide28.xml><?xml version="1.0" encoding="utf-8"?>
 <p:sld xmlns:a="http://schemas.openxmlformats.org/drawingml/2006/main" xmlns:r="http://schemas.openxmlformats.org/officeDocument/2006/relationships" xmlns:p="http://schemas.openxmlformats.org/presentationml/2006/main">
   <p:cSld>
     <p:spTree>
@@ -11000,7 +11261,7 @@
 </p:sld>
 </file>
 
-<file path=ppt/slides/slide26.xml><?xml version="1.0" encoding="utf-8"?>
+<file path=ppt/slides/slide29.xml><?xml version="1.0" encoding="utf-8"?>
 <p:sld xmlns:a="http://schemas.openxmlformats.org/drawingml/2006/main" xmlns:r="http://schemas.openxmlformats.org/officeDocument/2006/relationships" xmlns:p="http://schemas.openxmlformats.org/presentationml/2006/main">
   <p:cSld>
     <p:spTree>
@@ -11094,7 +11355,170 @@
 </p:sld>
 </file>
 
-<file path=ppt/slides/slide27.xml><?xml version="1.0" encoding="utf-8"?>
+<file path=ppt/slides/slide3.xml><?xml version="1.0" encoding="utf-8"?>
+<p:sld xmlns:a="http://schemas.openxmlformats.org/drawingml/2006/main" xmlns:r="http://schemas.openxmlformats.org/officeDocument/2006/relationships" xmlns:p="http://schemas.openxmlformats.org/presentationml/2006/main">
+  <p:cSld>
+    <p:spTree>
+      <p:nvGrpSpPr>
+        <p:cNvPr id="1" name=""/>
+        <p:cNvGrpSpPr/>
+        <p:nvPr/>
+      </p:nvGrpSpPr>
+      <p:grpSpPr>
+        <a:xfrm>
+          <a:off x="0" y="0"/>
+          <a:ext cx="0" cy="0"/>
+          <a:chOff x="0" y="0"/>
+          <a:chExt cx="0" cy="0"/>
+        </a:xfrm>
+      </p:grpSpPr>
+      <p:sp>
+        <p:nvSpPr>
+          <p:cNvPr id="2" name="Rectangle 1"/>
+          <p:cNvSpPr/>
+          <p:nvPr/>
+        </p:nvSpPr>
+        <p:spPr>
+          <a:xfrm>
+            <a:off x="228600" y="1295400"/>
+            <a:ext cx="8763000" cy="4678204"/>
+          </a:xfrm>
+          <a:prstGeom prst="rect">
+            <a:avLst/>
+          </a:prstGeom>
+        </p:spPr>
+        <p:txBody>
+          <a:bodyPr wrap="square">
+            <a:spAutoFit/>
+          </a:bodyPr>
+          <a:lstStyle/>
+          <a:p>
+            <a:pPr algn="just"/>
+            <a:r>
+              <a:rPr lang="en-US" sz="2800" dirty="0">
+                <a:latin typeface="Times New Roman" pitchFamily="18" charset="0"/>
+                <a:cs typeface="Times New Roman" pitchFamily="18" charset="0"/>
+              </a:rPr>
+              <a:t>Data Warehousing and Online Analytical Processing(OLAP):</a:t>
+            </a:r>
+          </a:p>
+          <a:p>
+            <a:pPr algn="just"/>
+            <a:endParaRPr lang="en-US" sz="2200" dirty="0">
+              <a:latin typeface="Times New Roman" pitchFamily="18" charset="0"/>
+              <a:cs typeface="Times New Roman" pitchFamily="18" charset="0"/>
+            </a:endParaRPr>
+          </a:p>
+          <a:p>
+            <a:pPr marL="342900" indent="-342900" algn="just">
+              <a:buFont typeface="Arial" panose="020B0604020202020204" pitchFamily="34" charset="0"/>
+              <a:buChar char="•"/>
+            </a:pPr>
+            <a:r>
+              <a:rPr lang="en-US" sz="2200" dirty="0">
+                <a:latin typeface="Times New Roman" pitchFamily="18" charset="0"/>
+                <a:cs typeface="Times New Roman" pitchFamily="18" charset="0"/>
+              </a:rPr>
+              <a:t>	Data warehouses generalize and consolidate data in </a:t>
+            </a:r>
+            <a:r>
+              <a:rPr lang="en-US" sz="2200" dirty="0">
+                <a:solidFill>
+                  <a:srgbClr val="FF0000"/>
+                </a:solidFill>
+                <a:latin typeface="Times New Roman" pitchFamily="18" charset="0"/>
+                <a:cs typeface="Times New Roman" pitchFamily="18" charset="0"/>
+              </a:rPr>
+              <a:t>multidimensional space</a:t>
+            </a:r>
+            <a:r>
+              <a:rPr lang="en-US" sz="2200" dirty="0">
+                <a:latin typeface="Times New Roman" pitchFamily="18" charset="0"/>
+                <a:cs typeface="Times New Roman" pitchFamily="18" charset="0"/>
+              </a:rPr>
+              <a:t>. The construction of data warehouses involves </a:t>
+            </a:r>
+            <a:r>
+              <a:rPr lang="en-US" sz="2200" dirty="0">
+                <a:solidFill>
+                  <a:srgbClr val="FF0000"/>
+                </a:solidFill>
+                <a:latin typeface="Times New Roman" pitchFamily="18" charset="0"/>
+                <a:cs typeface="Times New Roman" pitchFamily="18" charset="0"/>
+              </a:rPr>
+              <a:t>data cleaning, data integration, and data transformation, </a:t>
+            </a:r>
+            <a:r>
+              <a:rPr lang="en-US" sz="2200" dirty="0">
+                <a:latin typeface="Times New Roman" pitchFamily="18" charset="0"/>
+                <a:cs typeface="Times New Roman" pitchFamily="18" charset="0"/>
+              </a:rPr>
+              <a:t>and can be viewed as an important preprocessing step for data mining. </a:t>
+            </a:r>
+          </a:p>
+          <a:p>
+            <a:pPr marL="342900" indent="-342900" algn="just">
+              <a:buFont typeface="Arial" panose="020B0604020202020204" pitchFamily="34" charset="0"/>
+              <a:buChar char="•"/>
+            </a:pPr>
+            <a:endParaRPr lang="en-US" sz="2200" dirty="0">
+              <a:latin typeface="Times New Roman" pitchFamily="18" charset="0"/>
+              <a:cs typeface="Times New Roman" pitchFamily="18" charset="0"/>
+            </a:endParaRPr>
+          </a:p>
+          <a:p>
+            <a:pPr marL="342900" indent="-342900" algn="just">
+              <a:buFont typeface="Arial" panose="020B0604020202020204" pitchFamily="34" charset="0"/>
+              <a:buChar char="•"/>
+            </a:pPr>
+            <a:r>
+              <a:rPr lang="en-US" sz="2200" dirty="0">
+                <a:latin typeface="Times New Roman" pitchFamily="18" charset="0"/>
+                <a:cs typeface="Times New Roman" pitchFamily="18" charset="0"/>
+              </a:rPr>
+              <a:t>	Moreover, data warehouses provide </a:t>
+            </a:r>
+            <a:r>
+              <a:rPr lang="en-US" sz="2200" dirty="0">
+                <a:solidFill>
+                  <a:srgbClr val="FF0000"/>
+                </a:solidFill>
+                <a:latin typeface="Times New Roman" pitchFamily="18" charset="0"/>
+                <a:cs typeface="Times New Roman" pitchFamily="18" charset="0"/>
+              </a:rPr>
+              <a:t>online analytical processing </a:t>
+            </a:r>
+            <a:r>
+              <a:rPr lang="en-US" sz="2200" dirty="0">
+                <a:latin typeface="Times New Roman" pitchFamily="18" charset="0"/>
+                <a:cs typeface="Times New Roman" pitchFamily="18" charset="0"/>
+              </a:rPr>
+              <a:t>(OLAP) tools for the interactive analysis of multidimensional data of varied granularities, which facilitates effective data generalization and data mining.</a:t>
+            </a:r>
+          </a:p>
+          <a:p>
+            <a:pPr algn="just"/>
+            <a:endParaRPr lang="en-IN" sz="2200" dirty="0">
+              <a:latin typeface="Times New Roman" pitchFamily="18" charset="0"/>
+              <a:cs typeface="Times New Roman" pitchFamily="18" charset="0"/>
+            </a:endParaRPr>
+          </a:p>
+        </p:txBody>
+      </p:sp>
+    </p:spTree>
+    <p:extLst>
+      <p:ext uri="{BB962C8B-B14F-4D97-AF65-F5344CB8AC3E}">
+        <p14:creationId xmlns:p14="http://schemas.microsoft.com/office/powerpoint/2010/main" val="4253536164"/>
+      </p:ext>
+    </p:extLst>
+  </p:cSld>
+  <p:clrMapOvr>
+    <a:masterClrMapping/>
+  </p:clrMapOvr>
+</p:sld>
+</file>
+
+<file path=ppt/slides/slide30.xml><?xml version="1.0" encoding="utf-8"?>
 <p:sld xmlns:a="http://schemas.openxmlformats.org/drawingml/2006/main" xmlns:r="http://schemas.openxmlformats.org/officeDocument/2006/relationships" xmlns:p="http://schemas.openxmlformats.org/presentationml/2006/main">
   <p:cSld>
     <p:spTree>
@@ -11188,7 +11612,7 @@
 </p:sld>
 </file>
 
-<file path=ppt/slides/slide28.xml><?xml version="1.0" encoding="utf-8"?>
+<file path=ppt/slides/slide31.xml><?xml version="1.0" encoding="utf-8"?>
 <p:sld xmlns:a="http://schemas.openxmlformats.org/drawingml/2006/main" xmlns:r="http://schemas.openxmlformats.org/officeDocument/2006/relationships" xmlns:p="http://schemas.openxmlformats.org/presentationml/2006/main">
   <p:cSld>
     <p:spTree>
@@ -11282,7 +11706,7 @@
 </p:sld>
 </file>
 
-<file path=ppt/slides/slide29.xml><?xml version="1.0" encoding="utf-8"?>
+<file path=ppt/slides/slide32.xml><?xml version="1.0" encoding="utf-8"?>
 <p:sld xmlns:a="http://schemas.openxmlformats.org/drawingml/2006/main" xmlns:r="http://schemas.openxmlformats.org/officeDocument/2006/relationships" xmlns:p="http://schemas.openxmlformats.org/presentationml/2006/main">
   <p:cSld>
     <p:spTree>
@@ -11637,170 +12061,7 @@
 </p:sld>
 </file>
 
-<file path=ppt/slides/slide3.xml><?xml version="1.0" encoding="utf-8"?>
-<p:sld xmlns:a="http://schemas.openxmlformats.org/drawingml/2006/main" xmlns:r="http://schemas.openxmlformats.org/officeDocument/2006/relationships" xmlns:p="http://schemas.openxmlformats.org/presentationml/2006/main">
-  <p:cSld>
-    <p:spTree>
-      <p:nvGrpSpPr>
-        <p:cNvPr id="1" name=""/>
-        <p:cNvGrpSpPr/>
-        <p:nvPr/>
-      </p:nvGrpSpPr>
-      <p:grpSpPr>
-        <a:xfrm>
-          <a:off x="0" y="0"/>
-          <a:ext cx="0" cy="0"/>
-          <a:chOff x="0" y="0"/>
-          <a:chExt cx="0" cy="0"/>
-        </a:xfrm>
-      </p:grpSpPr>
-      <p:sp>
-        <p:nvSpPr>
-          <p:cNvPr id="2" name="Rectangle 1"/>
-          <p:cNvSpPr/>
-          <p:nvPr/>
-        </p:nvSpPr>
-        <p:spPr>
-          <a:xfrm>
-            <a:off x="228600" y="1295400"/>
-            <a:ext cx="8763000" cy="4678204"/>
-          </a:xfrm>
-          <a:prstGeom prst="rect">
-            <a:avLst/>
-          </a:prstGeom>
-        </p:spPr>
-        <p:txBody>
-          <a:bodyPr wrap="square">
-            <a:spAutoFit/>
-          </a:bodyPr>
-          <a:lstStyle/>
-          <a:p>
-            <a:pPr algn="just"/>
-            <a:r>
-              <a:rPr lang="en-US" sz="2800" dirty="0">
-                <a:latin typeface="Times New Roman" pitchFamily="18" charset="0"/>
-                <a:cs typeface="Times New Roman" pitchFamily="18" charset="0"/>
-              </a:rPr>
-              <a:t>Data Warehousing and Online Analytical Processing(OLAP):</a:t>
-            </a:r>
-          </a:p>
-          <a:p>
-            <a:pPr algn="just"/>
-            <a:endParaRPr lang="en-US" sz="2200" dirty="0">
-              <a:latin typeface="Times New Roman" pitchFamily="18" charset="0"/>
-              <a:cs typeface="Times New Roman" pitchFamily="18" charset="0"/>
-            </a:endParaRPr>
-          </a:p>
-          <a:p>
-            <a:pPr marL="342900" indent="-342900" algn="just">
-              <a:buFont typeface="Arial" panose="020B0604020202020204" pitchFamily="34" charset="0"/>
-              <a:buChar char="•"/>
-            </a:pPr>
-            <a:r>
-              <a:rPr lang="en-US" sz="2200" dirty="0">
-                <a:latin typeface="Times New Roman" pitchFamily="18" charset="0"/>
-                <a:cs typeface="Times New Roman" pitchFamily="18" charset="0"/>
-              </a:rPr>
-              <a:t>	Data warehouses generalize and consolidate data in </a:t>
-            </a:r>
-            <a:r>
-              <a:rPr lang="en-US" sz="2200" dirty="0">
-                <a:solidFill>
-                  <a:srgbClr val="FF0000"/>
-                </a:solidFill>
-                <a:latin typeface="Times New Roman" pitchFamily="18" charset="0"/>
-                <a:cs typeface="Times New Roman" pitchFamily="18" charset="0"/>
-              </a:rPr>
-              <a:t>multidimensional space</a:t>
-            </a:r>
-            <a:r>
-              <a:rPr lang="en-US" sz="2200" dirty="0">
-                <a:latin typeface="Times New Roman" pitchFamily="18" charset="0"/>
-                <a:cs typeface="Times New Roman" pitchFamily="18" charset="0"/>
-              </a:rPr>
-              <a:t>. The construction of data warehouses involves </a:t>
-            </a:r>
-            <a:r>
-              <a:rPr lang="en-US" sz="2200" dirty="0">
-                <a:solidFill>
-                  <a:srgbClr val="FF0000"/>
-                </a:solidFill>
-                <a:latin typeface="Times New Roman" pitchFamily="18" charset="0"/>
-                <a:cs typeface="Times New Roman" pitchFamily="18" charset="0"/>
-              </a:rPr>
-              <a:t>data cleaning, data integration, and data transformation, </a:t>
-            </a:r>
-            <a:r>
-              <a:rPr lang="en-US" sz="2200" dirty="0">
-                <a:latin typeface="Times New Roman" pitchFamily="18" charset="0"/>
-                <a:cs typeface="Times New Roman" pitchFamily="18" charset="0"/>
-              </a:rPr>
-              <a:t>and can be viewed as an important preprocessing step for data mining. </a:t>
-            </a:r>
-          </a:p>
-          <a:p>
-            <a:pPr marL="342900" indent="-342900" algn="just">
-              <a:buFont typeface="Arial" panose="020B0604020202020204" pitchFamily="34" charset="0"/>
-              <a:buChar char="•"/>
-            </a:pPr>
-            <a:endParaRPr lang="en-US" sz="2200" dirty="0">
-              <a:latin typeface="Times New Roman" pitchFamily="18" charset="0"/>
-              <a:cs typeface="Times New Roman" pitchFamily="18" charset="0"/>
-            </a:endParaRPr>
-          </a:p>
-          <a:p>
-            <a:pPr marL="342900" indent="-342900" algn="just">
-              <a:buFont typeface="Arial" panose="020B0604020202020204" pitchFamily="34" charset="0"/>
-              <a:buChar char="•"/>
-            </a:pPr>
-            <a:r>
-              <a:rPr lang="en-US" sz="2200" dirty="0">
-                <a:latin typeface="Times New Roman" pitchFamily="18" charset="0"/>
-                <a:cs typeface="Times New Roman" pitchFamily="18" charset="0"/>
-              </a:rPr>
-              <a:t>	Moreover, data warehouses provide </a:t>
-            </a:r>
-            <a:r>
-              <a:rPr lang="en-US" sz="2200" dirty="0">
-                <a:solidFill>
-                  <a:srgbClr val="FF0000"/>
-                </a:solidFill>
-                <a:latin typeface="Times New Roman" pitchFamily="18" charset="0"/>
-                <a:cs typeface="Times New Roman" pitchFamily="18" charset="0"/>
-              </a:rPr>
-              <a:t>online analytical processing </a:t>
-            </a:r>
-            <a:r>
-              <a:rPr lang="en-US" sz="2200" dirty="0">
-                <a:latin typeface="Times New Roman" pitchFamily="18" charset="0"/>
-                <a:cs typeface="Times New Roman" pitchFamily="18" charset="0"/>
-              </a:rPr>
-              <a:t>(OLAP) tools for the interactive analysis of multidimensional data of varied granularities, which facilitates effective data generalization and data mining.</a:t>
-            </a:r>
-          </a:p>
-          <a:p>
-            <a:pPr algn="just"/>
-            <a:endParaRPr lang="en-IN" sz="2200" dirty="0">
-              <a:latin typeface="Times New Roman" pitchFamily="18" charset="0"/>
-              <a:cs typeface="Times New Roman" pitchFamily="18" charset="0"/>
-            </a:endParaRPr>
-          </a:p>
-        </p:txBody>
-      </p:sp>
-    </p:spTree>
-    <p:extLst>
-      <p:ext uri="{BB962C8B-B14F-4D97-AF65-F5344CB8AC3E}">
-        <p14:creationId xmlns:p14="http://schemas.microsoft.com/office/powerpoint/2010/main" val="4253536164"/>
-      </p:ext>
-    </p:extLst>
-  </p:cSld>
-  <p:clrMapOvr>
-    <a:masterClrMapping/>
-  </p:clrMapOvr>
-</p:sld>
-</file>
-
-<file path=ppt/slides/slide30.xml><?xml version="1.0" encoding="utf-8"?>
+<file path=ppt/slides/slide33.xml><?xml version="1.0" encoding="utf-8"?>
 <p:sld xmlns:a="http://schemas.openxmlformats.org/drawingml/2006/main" xmlns:r="http://schemas.openxmlformats.org/officeDocument/2006/relationships" xmlns:p="http://schemas.openxmlformats.org/presentationml/2006/main">
   <p:cSld>
     <p:spTree>
@@ -12327,7 +12588,7 @@
 </p:sld>
 </file>
 
-<file path=ppt/slides/slide31.xml><?xml version="1.0" encoding="utf-8"?>
+<file path=ppt/slides/slide34.xml><?xml version="1.0" encoding="utf-8"?>
 <p:sld xmlns:a="http://schemas.openxmlformats.org/drawingml/2006/main" xmlns:r="http://schemas.openxmlformats.org/officeDocument/2006/relationships" xmlns:p="http://schemas.openxmlformats.org/presentationml/2006/main">
   <p:cSld>
     <p:spTree>
@@ -12948,7 +13209,7 @@
 </p:sld>
 </file>
 
-<file path=ppt/slides/slide32.xml><?xml version="1.0" encoding="utf-8"?>
+<file path=ppt/slides/slide35.xml><?xml version="1.0" encoding="utf-8"?>
 <p:sld xmlns:a="http://schemas.openxmlformats.org/drawingml/2006/main" xmlns:r="http://schemas.openxmlformats.org/officeDocument/2006/relationships" xmlns:p="http://schemas.openxmlformats.org/presentationml/2006/main">
   <p:cSld>
     <p:spTree>
@@ -13972,7 +14233,7 @@
 </p:sld>
 </file>
 
-<file path=ppt/slides/slide33.xml><?xml version="1.0" encoding="utf-8"?>
+<file path=ppt/slides/slide36.xml><?xml version="1.0" encoding="utf-8"?>
 <p:sld xmlns:a="http://schemas.openxmlformats.org/drawingml/2006/main" xmlns:r="http://schemas.openxmlformats.org/officeDocument/2006/relationships" xmlns:p="http://schemas.openxmlformats.org/presentationml/2006/main">
   <p:cSld>
     <p:spTree>
@@ -14078,7 +14339,7 @@
 </p:sld>
 </file>
 
-<file path=ppt/slides/slide34.xml><?xml version="1.0" encoding="utf-8"?>
+<file path=ppt/slides/slide37.xml><?xml version="1.0" encoding="utf-8"?>
 <p:sld xmlns:a="http://schemas.openxmlformats.org/drawingml/2006/main" xmlns:r="http://schemas.openxmlformats.org/officeDocument/2006/relationships" xmlns:p="http://schemas.openxmlformats.org/presentationml/2006/main">
   <p:cSld>
     <p:spTree>
@@ -14172,7 +14433,7 @@
 </p:sld>
 </file>
 
-<file path=ppt/slides/slide35.xml><?xml version="1.0" encoding="utf-8"?>
+<file path=ppt/slides/slide38.xml><?xml version="1.0" encoding="utf-8"?>
 <p:sld xmlns:a="http://schemas.openxmlformats.org/drawingml/2006/main" xmlns:r="http://schemas.openxmlformats.org/officeDocument/2006/relationships" xmlns:p="http://schemas.openxmlformats.org/presentationml/2006/main">
   <p:cSld>
     <p:spTree>
@@ -14266,7 +14527,7 @@
 </p:sld>
 </file>
 
-<file path=ppt/slides/slide36.xml><?xml version="1.0" encoding="utf-8"?>
+<file path=ppt/slides/slide39.xml><?xml version="1.0" encoding="utf-8"?>
 <p:sld xmlns:a="http://schemas.openxmlformats.org/drawingml/2006/main" xmlns:r="http://schemas.openxmlformats.org/officeDocument/2006/relationships" xmlns:p="http://schemas.openxmlformats.org/presentationml/2006/main">
   <p:cSld>
     <p:spTree>
@@ -14633,7 +14894,477 @@
 </p:sld>
 </file>
 
-<file path=ppt/slides/slide37.xml><?xml version="1.0" encoding="utf-8"?>
+<file path=ppt/slides/slide4.xml><?xml version="1.0" encoding="utf-8"?>
+<p:sld xmlns:a="http://schemas.openxmlformats.org/drawingml/2006/main" xmlns:r="http://schemas.openxmlformats.org/officeDocument/2006/relationships" xmlns:p="http://schemas.openxmlformats.org/presentationml/2006/main">
+  <p:cSld>
+    <p:spTree>
+      <p:nvGrpSpPr>
+        <p:cNvPr id="1" name=""/>
+        <p:cNvGrpSpPr/>
+        <p:nvPr/>
+      </p:nvGrpSpPr>
+      <p:grpSpPr>
+        <a:xfrm>
+          <a:off x="0" y="0"/>
+          <a:ext cx="0" cy="0"/>
+          <a:chOff x="0" y="0"/>
+          <a:chExt cx="0" cy="0"/>
+        </a:xfrm>
+      </p:grpSpPr>
+      <p:sp>
+        <p:nvSpPr>
+          <p:cNvPr id="3" name="Rectangle 3"/>
+          <p:cNvSpPr txBox="1">
+            <a:spLocks noChangeArrowheads="1"/>
+          </p:cNvSpPr>
+          <p:nvPr/>
+        </p:nvSpPr>
+        <p:spPr>
+          <a:xfrm>
+            <a:off x="228600" y="228600"/>
+            <a:ext cx="8686800" cy="6477000"/>
+          </a:xfrm>
+          <a:prstGeom prst="rect">
+            <a:avLst/>
+          </a:prstGeom>
+        </p:spPr>
+        <p:txBody>
+          <a:bodyPr lIns="92075" tIns="46038" rIns="92075" bIns="46038"/>
+          <a:lstStyle>
+            <a:lvl1pPr marL="342900" indent="-342900" algn="l" defTabSz="914400" rtl="0" eaLnBrk="1" latinLnBrk="0" hangingPunct="1">
+              <a:spcBef>
+                <a:spcPct val="20000"/>
+              </a:spcBef>
+              <a:buFont typeface="Arial" pitchFamily="34" charset="0"/>
+              <a:buChar char="•"/>
+              <a:defRPr sz="3200" kern="1200">
+                <a:solidFill>
+                  <a:schemeClr val="tx1"/>
+                </a:solidFill>
+                <a:latin typeface="+mn-lt"/>
+                <a:ea typeface="+mn-ea"/>
+                <a:cs typeface="+mn-cs"/>
+              </a:defRPr>
+            </a:lvl1pPr>
+            <a:lvl2pPr marL="742950" indent="-285750" algn="l" defTabSz="914400" rtl="0" eaLnBrk="1" latinLnBrk="0" hangingPunct="1">
+              <a:spcBef>
+                <a:spcPct val="20000"/>
+              </a:spcBef>
+              <a:buFont typeface="Arial" pitchFamily="34" charset="0"/>
+              <a:buChar char="–"/>
+              <a:defRPr sz="2800" kern="1200">
+                <a:solidFill>
+                  <a:schemeClr val="tx1"/>
+                </a:solidFill>
+                <a:latin typeface="+mn-lt"/>
+                <a:ea typeface="+mn-ea"/>
+                <a:cs typeface="+mn-cs"/>
+              </a:defRPr>
+            </a:lvl2pPr>
+            <a:lvl3pPr marL="1143000" indent="-228600" algn="l" defTabSz="914400" rtl="0" eaLnBrk="1" latinLnBrk="0" hangingPunct="1">
+              <a:spcBef>
+                <a:spcPct val="20000"/>
+              </a:spcBef>
+              <a:buFont typeface="Arial" pitchFamily="34" charset="0"/>
+              <a:buChar char="•"/>
+              <a:defRPr sz="2400" kern="1200">
+                <a:solidFill>
+                  <a:schemeClr val="tx1"/>
+                </a:solidFill>
+                <a:latin typeface="+mn-lt"/>
+                <a:ea typeface="+mn-ea"/>
+                <a:cs typeface="+mn-cs"/>
+              </a:defRPr>
+            </a:lvl3pPr>
+            <a:lvl4pPr marL="1600200" indent="-228600" algn="l" defTabSz="914400" rtl="0" eaLnBrk="1" latinLnBrk="0" hangingPunct="1">
+              <a:spcBef>
+                <a:spcPct val="20000"/>
+              </a:spcBef>
+              <a:buFont typeface="Arial" pitchFamily="34" charset="0"/>
+              <a:buChar char="–"/>
+              <a:defRPr sz="2000" kern="1200">
+                <a:solidFill>
+                  <a:schemeClr val="tx1"/>
+                </a:solidFill>
+                <a:latin typeface="+mn-lt"/>
+                <a:ea typeface="+mn-ea"/>
+                <a:cs typeface="+mn-cs"/>
+              </a:defRPr>
+            </a:lvl4pPr>
+            <a:lvl5pPr marL="2057400" indent="-228600" algn="l" defTabSz="914400" rtl="0" eaLnBrk="1" latinLnBrk="0" hangingPunct="1">
+              <a:spcBef>
+                <a:spcPct val="20000"/>
+              </a:spcBef>
+              <a:buFont typeface="Arial" pitchFamily="34" charset="0"/>
+              <a:buChar char="»"/>
+              <a:defRPr sz="2000" kern="1200">
+                <a:solidFill>
+                  <a:schemeClr val="tx1"/>
+                </a:solidFill>
+                <a:latin typeface="+mn-lt"/>
+                <a:ea typeface="+mn-ea"/>
+                <a:cs typeface="+mn-cs"/>
+              </a:defRPr>
+            </a:lvl5pPr>
+            <a:lvl6pPr marL="2514600" indent="-228600" algn="l" defTabSz="914400" rtl="0" eaLnBrk="1" latinLnBrk="0" hangingPunct="1">
+              <a:spcBef>
+                <a:spcPct val="20000"/>
+              </a:spcBef>
+              <a:buFont typeface="Arial" pitchFamily="34" charset="0"/>
+              <a:buChar char="•"/>
+              <a:defRPr sz="2000" kern="1200">
+                <a:solidFill>
+                  <a:schemeClr val="tx1"/>
+                </a:solidFill>
+                <a:latin typeface="+mn-lt"/>
+                <a:ea typeface="+mn-ea"/>
+                <a:cs typeface="+mn-cs"/>
+              </a:defRPr>
+            </a:lvl6pPr>
+            <a:lvl7pPr marL="2971800" indent="-228600" algn="l" defTabSz="914400" rtl="0" eaLnBrk="1" latinLnBrk="0" hangingPunct="1">
+              <a:spcBef>
+                <a:spcPct val="20000"/>
+              </a:spcBef>
+              <a:buFont typeface="Arial" pitchFamily="34" charset="0"/>
+              <a:buChar char="•"/>
+              <a:defRPr sz="2000" kern="1200">
+                <a:solidFill>
+                  <a:schemeClr val="tx1"/>
+                </a:solidFill>
+                <a:latin typeface="+mn-lt"/>
+                <a:ea typeface="+mn-ea"/>
+                <a:cs typeface="+mn-cs"/>
+              </a:defRPr>
+            </a:lvl7pPr>
+            <a:lvl8pPr marL="3429000" indent="-228600" algn="l" defTabSz="914400" rtl="0" eaLnBrk="1" latinLnBrk="0" hangingPunct="1">
+              <a:spcBef>
+                <a:spcPct val="20000"/>
+              </a:spcBef>
+              <a:buFont typeface="Arial" pitchFamily="34" charset="0"/>
+              <a:buChar char="•"/>
+              <a:defRPr sz="2000" kern="1200">
+                <a:solidFill>
+                  <a:schemeClr val="tx1"/>
+                </a:solidFill>
+                <a:latin typeface="+mn-lt"/>
+                <a:ea typeface="+mn-ea"/>
+                <a:cs typeface="+mn-cs"/>
+              </a:defRPr>
+            </a:lvl8pPr>
+            <a:lvl9pPr marL="3886200" indent="-228600" algn="l" defTabSz="914400" rtl="0" eaLnBrk="1" latinLnBrk="0" hangingPunct="1">
+              <a:spcBef>
+                <a:spcPct val="20000"/>
+              </a:spcBef>
+              <a:buFont typeface="Arial" pitchFamily="34" charset="0"/>
+              <a:buChar char="•"/>
+              <a:defRPr sz="2000" kern="1200">
+                <a:solidFill>
+                  <a:schemeClr val="tx1"/>
+                </a:solidFill>
+                <a:latin typeface="+mn-lt"/>
+                <a:ea typeface="+mn-ea"/>
+                <a:cs typeface="+mn-cs"/>
+              </a:defRPr>
+            </a:lvl9pPr>
+          </a:lstStyle>
+          <a:p>
+            <a:pPr marL="0" indent="0" algn="just">
+              <a:lnSpc>
+                <a:spcPct val="140000"/>
+              </a:lnSpc>
+              <a:buNone/>
+            </a:pPr>
+            <a:r>
+              <a:rPr lang="en-IN" sz="2400" b="1" dirty="0">
+                <a:latin typeface="Times New Roman" pitchFamily="18" charset="0"/>
+                <a:cs typeface="Times New Roman" pitchFamily="18" charset="0"/>
+              </a:rPr>
+              <a:t>Data Warehouse: Basic Concepts</a:t>
+            </a:r>
+          </a:p>
+          <a:p>
+            <a:pPr marL="0" indent="0" algn="just">
+              <a:lnSpc>
+                <a:spcPct val="140000"/>
+              </a:lnSpc>
+              <a:buNone/>
+            </a:pPr>
+            <a:r>
+              <a:rPr lang="en-US" dirty="0">
+                <a:solidFill>
+                  <a:srgbClr val="FF0000"/>
+                </a:solidFill>
+                <a:latin typeface="Times New Roman" pitchFamily="18" charset="0"/>
+                <a:cs typeface="Times New Roman" pitchFamily="18" charset="0"/>
+              </a:rPr>
+              <a:t>What is data warehouse?</a:t>
+            </a:r>
+            <a:endParaRPr lang="en-US" sz="3600" dirty="0">
+              <a:latin typeface="Times New Roman" pitchFamily="18" charset="0"/>
+              <a:cs typeface="Times New Roman" pitchFamily="18" charset="0"/>
+            </a:endParaRPr>
+          </a:p>
+          <a:p>
+            <a:pPr algn="just">
+              <a:lnSpc>
+                <a:spcPct val="140000"/>
+              </a:lnSpc>
+            </a:pPr>
+            <a:r>
+              <a:rPr lang="en-US" sz="2200" dirty="0">
+                <a:latin typeface="Times New Roman" pitchFamily="18" charset="0"/>
+                <a:cs typeface="Times New Roman" pitchFamily="18" charset="0"/>
+              </a:rPr>
+              <a:t>Defined in many different ways, but not rigorously.</a:t>
+            </a:r>
+          </a:p>
+          <a:p>
+            <a:pPr lvl="1" algn="just">
+              <a:lnSpc>
+                <a:spcPct val="140000"/>
+              </a:lnSpc>
+            </a:pPr>
+            <a:r>
+              <a:rPr lang="en-US" sz="2200" dirty="0">
+                <a:latin typeface="Times New Roman" pitchFamily="18" charset="0"/>
+                <a:cs typeface="Times New Roman" pitchFamily="18" charset="0"/>
+              </a:rPr>
+              <a:t>A decision support database that is maintained </a:t>
+            </a:r>
+            <a:r>
+              <a:rPr lang="en-US" sz="2200" dirty="0">
+                <a:solidFill>
+                  <a:schemeClr val="hlink"/>
+                </a:solidFill>
+                <a:latin typeface="Times New Roman" pitchFamily="18" charset="0"/>
+                <a:cs typeface="Times New Roman" pitchFamily="18" charset="0"/>
+              </a:rPr>
+              <a:t>separately </a:t>
+            </a:r>
+            <a:r>
+              <a:rPr lang="en-US" sz="2200" dirty="0">
+                <a:latin typeface="Times New Roman" pitchFamily="18" charset="0"/>
+                <a:cs typeface="Times New Roman" pitchFamily="18" charset="0"/>
+              </a:rPr>
+              <a:t>from the organization’s operational database</a:t>
+            </a:r>
+          </a:p>
+          <a:p>
+            <a:pPr lvl="1" algn="just">
+              <a:lnSpc>
+                <a:spcPct val="140000"/>
+              </a:lnSpc>
+            </a:pPr>
+            <a:r>
+              <a:rPr lang="en-US" sz="2200" dirty="0">
+                <a:latin typeface="Times New Roman" pitchFamily="18" charset="0"/>
+                <a:cs typeface="Times New Roman" pitchFamily="18" charset="0"/>
+              </a:rPr>
+              <a:t>Support </a:t>
+            </a:r>
+            <a:r>
+              <a:rPr lang="en-US" sz="2200" dirty="0">
+                <a:solidFill>
+                  <a:schemeClr val="hlink"/>
+                </a:solidFill>
+                <a:latin typeface="Times New Roman" pitchFamily="18" charset="0"/>
+                <a:cs typeface="Times New Roman" pitchFamily="18" charset="0"/>
+              </a:rPr>
+              <a:t>information processing</a:t>
+            </a:r>
+            <a:r>
+              <a:rPr lang="en-US" sz="2200" dirty="0">
+                <a:latin typeface="Times New Roman" pitchFamily="18" charset="0"/>
+                <a:cs typeface="Times New Roman" pitchFamily="18" charset="0"/>
+              </a:rPr>
+              <a:t> by providing a solid platform of consolidated, historical data for analysis.</a:t>
+            </a:r>
+            <a:endParaRPr lang="en-US" sz="2200" dirty="0">
+              <a:solidFill>
+                <a:srgbClr val="7030A0"/>
+              </a:solidFill>
+              <a:latin typeface="Times New Roman" pitchFamily="18" charset="0"/>
+              <a:cs typeface="Times New Roman" pitchFamily="18" charset="0"/>
+            </a:endParaRPr>
+          </a:p>
+          <a:p>
+            <a:pPr algn="just">
+              <a:lnSpc>
+                <a:spcPct val="140000"/>
+              </a:lnSpc>
+            </a:pPr>
+            <a:r>
+              <a:rPr lang="en-US" sz="2200" dirty="0">
+                <a:solidFill>
+                  <a:srgbClr val="7030A0"/>
+                </a:solidFill>
+                <a:latin typeface="Times New Roman" pitchFamily="18" charset="0"/>
+                <a:cs typeface="Times New Roman" pitchFamily="18" charset="0"/>
+              </a:rPr>
+              <a:t>“A data warehouse is a </a:t>
+            </a:r>
+            <a:r>
+              <a:rPr lang="en-US" sz="2200" u="sng" dirty="0">
+                <a:solidFill>
+                  <a:srgbClr val="FF0000"/>
+                </a:solidFill>
+                <a:latin typeface="Times New Roman" pitchFamily="18" charset="0"/>
+                <a:cs typeface="Times New Roman" pitchFamily="18" charset="0"/>
+              </a:rPr>
+              <a:t>subject-oriented</a:t>
+            </a:r>
+            <a:r>
+              <a:rPr lang="en-US" sz="2200" dirty="0">
+                <a:solidFill>
+                  <a:srgbClr val="FF0000"/>
+                </a:solidFill>
+                <a:latin typeface="Times New Roman" pitchFamily="18" charset="0"/>
+                <a:cs typeface="Times New Roman" pitchFamily="18" charset="0"/>
+              </a:rPr>
+              <a:t>,</a:t>
+            </a:r>
+            <a:r>
+              <a:rPr lang="en-US" sz="2200" u="sng" dirty="0">
+                <a:solidFill>
+                  <a:srgbClr val="FF0000"/>
+                </a:solidFill>
+                <a:latin typeface="Times New Roman" pitchFamily="18" charset="0"/>
+                <a:cs typeface="Times New Roman" pitchFamily="18" charset="0"/>
+              </a:rPr>
+              <a:t> </a:t>
+            </a:r>
+            <a:r>
+              <a:rPr lang="en-US" sz="2200" u="sng" dirty="0">
+                <a:solidFill>
+                  <a:srgbClr val="00B0F0"/>
+                </a:solidFill>
+                <a:latin typeface="Times New Roman" pitchFamily="18" charset="0"/>
+                <a:cs typeface="Times New Roman" pitchFamily="18" charset="0"/>
+              </a:rPr>
+              <a:t>integrated</a:t>
+            </a:r>
+            <a:r>
+              <a:rPr lang="en-US" sz="2200" dirty="0">
+                <a:solidFill>
+                  <a:srgbClr val="FF0000"/>
+                </a:solidFill>
+                <a:latin typeface="Times New Roman" pitchFamily="18" charset="0"/>
+                <a:cs typeface="Times New Roman" pitchFamily="18" charset="0"/>
+              </a:rPr>
+              <a:t>, </a:t>
+            </a:r>
+            <a:r>
+              <a:rPr lang="en-US" sz="2200" u="sng" dirty="0">
+                <a:solidFill>
+                  <a:srgbClr val="FF0000"/>
+                </a:solidFill>
+                <a:latin typeface="Times New Roman" pitchFamily="18" charset="0"/>
+                <a:cs typeface="Times New Roman" pitchFamily="18" charset="0"/>
+              </a:rPr>
+              <a:t>time-variant</a:t>
+            </a:r>
+            <a:r>
+              <a:rPr lang="en-US" sz="2200" dirty="0">
+                <a:solidFill>
+                  <a:srgbClr val="FF0000"/>
+                </a:solidFill>
+                <a:latin typeface="Times New Roman" pitchFamily="18" charset="0"/>
+                <a:cs typeface="Times New Roman" pitchFamily="18" charset="0"/>
+              </a:rPr>
+              <a:t>, and </a:t>
+            </a:r>
+            <a:r>
+              <a:rPr lang="en-US" sz="2200" u="sng" dirty="0">
+                <a:solidFill>
+                  <a:srgbClr val="00B0F0"/>
+                </a:solidFill>
+                <a:latin typeface="Times New Roman" pitchFamily="18" charset="0"/>
+                <a:cs typeface="Times New Roman" pitchFamily="18" charset="0"/>
+              </a:rPr>
+              <a:t>nonvolatile</a:t>
+            </a:r>
+            <a:r>
+              <a:rPr lang="en-US" sz="2200" dirty="0">
+                <a:solidFill>
+                  <a:srgbClr val="FF0000"/>
+                </a:solidFill>
+                <a:latin typeface="Times New Roman" pitchFamily="18" charset="0"/>
+                <a:cs typeface="Times New Roman" pitchFamily="18" charset="0"/>
+              </a:rPr>
+              <a:t> </a:t>
+            </a:r>
+            <a:r>
+              <a:rPr lang="en-US" sz="2200" dirty="0">
+                <a:solidFill>
+                  <a:srgbClr val="7030A0"/>
+                </a:solidFill>
+                <a:latin typeface="Times New Roman" pitchFamily="18" charset="0"/>
+                <a:cs typeface="Times New Roman" pitchFamily="18" charset="0"/>
+              </a:rPr>
+              <a:t>collection of data in support of management’s decision-making process.”—W. H. </a:t>
+            </a:r>
+            <a:r>
+              <a:rPr lang="en-US" sz="2200" dirty="0" err="1">
+                <a:solidFill>
+                  <a:srgbClr val="7030A0"/>
+                </a:solidFill>
+                <a:latin typeface="Times New Roman" pitchFamily="18" charset="0"/>
+                <a:cs typeface="Times New Roman" pitchFamily="18" charset="0"/>
+              </a:rPr>
+              <a:t>Inmon</a:t>
+            </a:r>
+            <a:endParaRPr lang="en-US" sz="2200" dirty="0">
+              <a:solidFill>
+                <a:srgbClr val="7030A0"/>
+              </a:solidFill>
+              <a:latin typeface="Times New Roman" pitchFamily="18" charset="0"/>
+              <a:cs typeface="Times New Roman" pitchFamily="18" charset="0"/>
+            </a:endParaRPr>
+          </a:p>
+          <a:p>
+            <a:pPr algn="just">
+              <a:lnSpc>
+                <a:spcPct val="140000"/>
+              </a:lnSpc>
+            </a:pPr>
+            <a:r>
+              <a:rPr lang="en-US" sz="2200" dirty="0">
+                <a:latin typeface="Times New Roman" pitchFamily="18" charset="0"/>
+                <a:cs typeface="Times New Roman" pitchFamily="18" charset="0"/>
+              </a:rPr>
+              <a:t>Data warehousing:</a:t>
+            </a:r>
+          </a:p>
+          <a:p>
+            <a:pPr lvl="1" algn="just">
+              <a:lnSpc>
+                <a:spcPct val="140000"/>
+              </a:lnSpc>
+            </a:pPr>
+            <a:r>
+              <a:rPr lang="en-US" sz="2200" dirty="0">
+                <a:latin typeface="Times New Roman" pitchFamily="18" charset="0"/>
+                <a:cs typeface="Times New Roman" pitchFamily="18" charset="0"/>
+              </a:rPr>
+              <a:t>The process of constructing and using data warehouses</a:t>
+            </a:r>
+          </a:p>
+        </p:txBody>
+      </p:sp>
+    </p:spTree>
+    <p:extLst>
+      <p:ext uri="{BB962C8B-B14F-4D97-AF65-F5344CB8AC3E}">
+        <p14:creationId xmlns:p14="http://schemas.microsoft.com/office/powerpoint/2010/main" val="1833917524"/>
+      </p:ext>
+    </p:extLst>
+  </p:cSld>
+  <p:clrMapOvr>
+    <a:masterClrMapping/>
+  </p:clrMapOvr>
+</p:sld>
+</file>
+
+<file path=ppt/slides/slide40.xml><?xml version="1.0" encoding="utf-8"?>
 <p:sld xmlns:a="http://schemas.openxmlformats.org/drawingml/2006/main" xmlns:r="http://schemas.openxmlformats.org/officeDocument/2006/relationships" xmlns:p="http://schemas.openxmlformats.org/presentationml/2006/main">
   <p:cSld>
     <p:spTree>
@@ -14890,7 +15621,7 @@
 </p:sld>
 </file>
 
-<file path=ppt/slides/slide38.xml><?xml version="1.0" encoding="utf-8"?>
+<file path=ppt/slides/slide41.xml><?xml version="1.0" encoding="utf-8"?>
 <p:sld xmlns:a="http://schemas.openxmlformats.org/drawingml/2006/main" xmlns:r="http://schemas.openxmlformats.org/officeDocument/2006/relationships" xmlns:p="http://schemas.openxmlformats.org/presentationml/2006/main">
   <p:cSld>
     <p:spTree>
@@ -14984,7 +15715,7 @@
 </p:sld>
 </file>
 
-<file path=ppt/slides/slide39.xml><?xml version="1.0" encoding="utf-8"?>
+<file path=ppt/slides/slide42.xml><?xml version="1.0" encoding="utf-8"?>
 <p:sld xmlns:a="http://schemas.openxmlformats.org/drawingml/2006/main" xmlns:r="http://schemas.openxmlformats.org/officeDocument/2006/relationships" xmlns:p="http://schemas.openxmlformats.org/presentationml/2006/main">
   <p:cSld>
     <p:spTree>
@@ -15078,477 +15809,7 @@
 </p:sld>
 </file>
 
-<file path=ppt/slides/slide4.xml><?xml version="1.0" encoding="utf-8"?>
-<p:sld xmlns:a="http://schemas.openxmlformats.org/drawingml/2006/main" xmlns:r="http://schemas.openxmlformats.org/officeDocument/2006/relationships" xmlns:p="http://schemas.openxmlformats.org/presentationml/2006/main">
-  <p:cSld>
-    <p:spTree>
-      <p:nvGrpSpPr>
-        <p:cNvPr id="1" name=""/>
-        <p:cNvGrpSpPr/>
-        <p:nvPr/>
-      </p:nvGrpSpPr>
-      <p:grpSpPr>
-        <a:xfrm>
-          <a:off x="0" y="0"/>
-          <a:ext cx="0" cy="0"/>
-          <a:chOff x="0" y="0"/>
-          <a:chExt cx="0" cy="0"/>
-        </a:xfrm>
-      </p:grpSpPr>
-      <p:sp>
-        <p:nvSpPr>
-          <p:cNvPr id="3" name="Rectangle 3"/>
-          <p:cNvSpPr txBox="1">
-            <a:spLocks noChangeArrowheads="1"/>
-          </p:cNvSpPr>
-          <p:nvPr/>
-        </p:nvSpPr>
-        <p:spPr>
-          <a:xfrm>
-            <a:off x="228600" y="228600"/>
-            <a:ext cx="8686800" cy="6477000"/>
-          </a:xfrm>
-          <a:prstGeom prst="rect">
-            <a:avLst/>
-          </a:prstGeom>
-        </p:spPr>
-        <p:txBody>
-          <a:bodyPr lIns="92075" tIns="46038" rIns="92075" bIns="46038"/>
-          <a:lstStyle>
-            <a:lvl1pPr marL="342900" indent="-342900" algn="l" defTabSz="914400" rtl="0" eaLnBrk="1" latinLnBrk="0" hangingPunct="1">
-              <a:spcBef>
-                <a:spcPct val="20000"/>
-              </a:spcBef>
-              <a:buFont typeface="Arial" pitchFamily="34" charset="0"/>
-              <a:buChar char="•"/>
-              <a:defRPr sz="3200" kern="1200">
-                <a:solidFill>
-                  <a:schemeClr val="tx1"/>
-                </a:solidFill>
-                <a:latin typeface="+mn-lt"/>
-                <a:ea typeface="+mn-ea"/>
-                <a:cs typeface="+mn-cs"/>
-              </a:defRPr>
-            </a:lvl1pPr>
-            <a:lvl2pPr marL="742950" indent="-285750" algn="l" defTabSz="914400" rtl="0" eaLnBrk="1" latinLnBrk="0" hangingPunct="1">
-              <a:spcBef>
-                <a:spcPct val="20000"/>
-              </a:spcBef>
-              <a:buFont typeface="Arial" pitchFamily="34" charset="0"/>
-              <a:buChar char="–"/>
-              <a:defRPr sz="2800" kern="1200">
-                <a:solidFill>
-                  <a:schemeClr val="tx1"/>
-                </a:solidFill>
-                <a:latin typeface="+mn-lt"/>
-                <a:ea typeface="+mn-ea"/>
-                <a:cs typeface="+mn-cs"/>
-              </a:defRPr>
-            </a:lvl2pPr>
-            <a:lvl3pPr marL="1143000" indent="-228600" algn="l" defTabSz="914400" rtl="0" eaLnBrk="1" latinLnBrk="0" hangingPunct="1">
-              <a:spcBef>
-                <a:spcPct val="20000"/>
-              </a:spcBef>
-              <a:buFont typeface="Arial" pitchFamily="34" charset="0"/>
-              <a:buChar char="•"/>
-              <a:defRPr sz="2400" kern="1200">
-                <a:solidFill>
-                  <a:schemeClr val="tx1"/>
-                </a:solidFill>
-                <a:latin typeface="+mn-lt"/>
-                <a:ea typeface="+mn-ea"/>
-                <a:cs typeface="+mn-cs"/>
-              </a:defRPr>
-            </a:lvl3pPr>
-            <a:lvl4pPr marL="1600200" indent="-228600" algn="l" defTabSz="914400" rtl="0" eaLnBrk="1" latinLnBrk="0" hangingPunct="1">
-              <a:spcBef>
-                <a:spcPct val="20000"/>
-              </a:spcBef>
-              <a:buFont typeface="Arial" pitchFamily="34" charset="0"/>
-              <a:buChar char="–"/>
-              <a:defRPr sz="2000" kern="1200">
-                <a:solidFill>
-                  <a:schemeClr val="tx1"/>
-                </a:solidFill>
-                <a:latin typeface="+mn-lt"/>
-                <a:ea typeface="+mn-ea"/>
-                <a:cs typeface="+mn-cs"/>
-              </a:defRPr>
-            </a:lvl4pPr>
-            <a:lvl5pPr marL="2057400" indent="-228600" algn="l" defTabSz="914400" rtl="0" eaLnBrk="1" latinLnBrk="0" hangingPunct="1">
-              <a:spcBef>
-                <a:spcPct val="20000"/>
-              </a:spcBef>
-              <a:buFont typeface="Arial" pitchFamily="34" charset="0"/>
-              <a:buChar char="»"/>
-              <a:defRPr sz="2000" kern="1200">
-                <a:solidFill>
-                  <a:schemeClr val="tx1"/>
-                </a:solidFill>
-                <a:latin typeface="+mn-lt"/>
-                <a:ea typeface="+mn-ea"/>
-                <a:cs typeface="+mn-cs"/>
-              </a:defRPr>
-            </a:lvl5pPr>
-            <a:lvl6pPr marL="2514600" indent="-228600" algn="l" defTabSz="914400" rtl="0" eaLnBrk="1" latinLnBrk="0" hangingPunct="1">
-              <a:spcBef>
-                <a:spcPct val="20000"/>
-              </a:spcBef>
-              <a:buFont typeface="Arial" pitchFamily="34" charset="0"/>
-              <a:buChar char="•"/>
-              <a:defRPr sz="2000" kern="1200">
-                <a:solidFill>
-                  <a:schemeClr val="tx1"/>
-                </a:solidFill>
-                <a:latin typeface="+mn-lt"/>
-                <a:ea typeface="+mn-ea"/>
-                <a:cs typeface="+mn-cs"/>
-              </a:defRPr>
-            </a:lvl6pPr>
-            <a:lvl7pPr marL="2971800" indent="-228600" algn="l" defTabSz="914400" rtl="0" eaLnBrk="1" latinLnBrk="0" hangingPunct="1">
-              <a:spcBef>
-                <a:spcPct val="20000"/>
-              </a:spcBef>
-              <a:buFont typeface="Arial" pitchFamily="34" charset="0"/>
-              <a:buChar char="•"/>
-              <a:defRPr sz="2000" kern="1200">
-                <a:solidFill>
-                  <a:schemeClr val="tx1"/>
-                </a:solidFill>
-                <a:latin typeface="+mn-lt"/>
-                <a:ea typeface="+mn-ea"/>
-                <a:cs typeface="+mn-cs"/>
-              </a:defRPr>
-            </a:lvl7pPr>
-            <a:lvl8pPr marL="3429000" indent="-228600" algn="l" defTabSz="914400" rtl="0" eaLnBrk="1" latinLnBrk="0" hangingPunct="1">
-              <a:spcBef>
-                <a:spcPct val="20000"/>
-              </a:spcBef>
-              <a:buFont typeface="Arial" pitchFamily="34" charset="0"/>
-              <a:buChar char="•"/>
-              <a:defRPr sz="2000" kern="1200">
-                <a:solidFill>
-                  <a:schemeClr val="tx1"/>
-                </a:solidFill>
-                <a:latin typeface="+mn-lt"/>
-                <a:ea typeface="+mn-ea"/>
-                <a:cs typeface="+mn-cs"/>
-              </a:defRPr>
-            </a:lvl8pPr>
-            <a:lvl9pPr marL="3886200" indent="-228600" algn="l" defTabSz="914400" rtl="0" eaLnBrk="1" latinLnBrk="0" hangingPunct="1">
-              <a:spcBef>
-                <a:spcPct val="20000"/>
-              </a:spcBef>
-              <a:buFont typeface="Arial" pitchFamily="34" charset="0"/>
-              <a:buChar char="•"/>
-              <a:defRPr sz="2000" kern="1200">
-                <a:solidFill>
-                  <a:schemeClr val="tx1"/>
-                </a:solidFill>
-                <a:latin typeface="+mn-lt"/>
-                <a:ea typeface="+mn-ea"/>
-                <a:cs typeface="+mn-cs"/>
-              </a:defRPr>
-            </a:lvl9pPr>
-          </a:lstStyle>
-          <a:p>
-            <a:pPr marL="0" indent="0" algn="just">
-              <a:lnSpc>
-                <a:spcPct val="140000"/>
-              </a:lnSpc>
-              <a:buNone/>
-            </a:pPr>
-            <a:r>
-              <a:rPr lang="en-IN" sz="2400" b="1" dirty="0">
-                <a:latin typeface="Times New Roman" pitchFamily="18" charset="0"/>
-                <a:cs typeface="Times New Roman" pitchFamily="18" charset="0"/>
-              </a:rPr>
-              <a:t>Data Warehouse: Basic Concepts</a:t>
-            </a:r>
-          </a:p>
-          <a:p>
-            <a:pPr marL="0" indent="0" algn="just">
-              <a:lnSpc>
-                <a:spcPct val="140000"/>
-              </a:lnSpc>
-              <a:buNone/>
-            </a:pPr>
-            <a:r>
-              <a:rPr lang="en-US" dirty="0">
-                <a:solidFill>
-                  <a:srgbClr val="FF0000"/>
-                </a:solidFill>
-                <a:latin typeface="Times New Roman" pitchFamily="18" charset="0"/>
-                <a:cs typeface="Times New Roman" pitchFamily="18" charset="0"/>
-              </a:rPr>
-              <a:t>What is data warehouse?</a:t>
-            </a:r>
-            <a:endParaRPr lang="en-US" sz="3600" dirty="0">
-              <a:latin typeface="Times New Roman" pitchFamily="18" charset="0"/>
-              <a:cs typeface="Times New Roman" pitchFamily="18" charset="0"/>
-            </a:endParaRPr>
-          </a:p>
-          <a:p>
-            <a:pPr algn="just">
-              <a:lnSpc>
-                <a:spcPct val="140000"/>
-              </a:lnSpc>
-            </a:pPr>
-            <a:r>
-              <a:rPr lang="en-US" sz="2200" dirty="0">
-                <a:latin typeface="Times New Roman" pitchFamily="18" charset="0"/>
-                <a:cs typeface="Times New Roman" pitchFamily="18" charset="0"/>
-              </a:rPr>
-              <a:t>Defined in many different ways, but not rigorously.</a:t>
-            </a:r>
-          </a:p>
-          <a:p>
-            <a:pPr lvl="1" algn="just">
-              <a:lnSpc>
-                <a:spcPct val="140000"/>
-              </a:lnSpc>
-            </a:pPr>
-            <a:r>
-              <a:rPr lang="en-US" sz="2200" dirty="0">
-                <a:latin typeface="Times New Roman" pitchFamily="18" charset="0"/>
-                <a:cs typeface="Times New Roman" pitchFamily="18" charset="0"/>
-              </a:rPr>
-              <a:t>A decision support database that is maintained </a:t>
-            </a:r>
-            <a:r>
-              <a:rPr lang="en-US" sz="2200" dirty="0">
-                <a:solidFill>
-                  <a:schemeClr val="hlink"/>
-                </a:solidFill>
-                <a:latin typeface="Times New Roman" pitchFamily="18" charset="0"/>
-                <a:cs typeface="Times New Roman" pitchFamily="18" charset="0"/>
-              </a:rPr>
-              <a:t>separately </a:t>
-            </a:r>
-            <a:r>
-              <a:rPr lang="en-US" sz="2200" dirty="0">
-                <a:latin typeface="Times New Roman" pitchFamily="18" charset="0"/>
-                <a:cs typeface="Times New Roman" pitchFamily="18" charset="0"/>
-              </a:rPr>
-              <a:t>from the organization’s operational database</a:t>
-            </a:r>
-          </a:p>
-          <a:p>
-            <a:pPr lvl="1" algn="just">
-              <a:lnSpc>
-                <a:spcPct val="140000"/>
-              </a:lnSpc>
-            </a:pPr>
-            <a:r>
-              <a:rPr lang="en-US" sz="2200" dirty="0">
-                <a:latin typeface="Times New Roman" pitchFamily="18" charset="0"/>
-                <a:cs typeface="Times New Roman" pitchFamily="18" charset="0"/>
-              </a:rPr>
-              <a:t>Support </a:t>
-            </a:r>
-            <a:r>
-              <a:rPr lang="en-US" sz="2200" dirty="0">
-                <a:solidFill>
-                  <a:schemeClr val="hlink"/>
-                </a:solidFill>
-                <a:latin typeface="Times New Roman" pitchFamily="18" charset="0"/>
-                <a:cs typeface="Times New Roman" pitchFamily="18" charset="0"/>
-              </a:rPr>
-              <a:t>information processing</a:t>
-            </a:r>
-            <a:r>
-              <a:rPr lang="en-US" sz="2200" dirty="0">
-                <a:latin typeface="Times New Roman" pitchFamily="18" charset="0"/>
-                <a:cs typeface="Times New Roman" pitchFamily="18" charset="0"/>
-              </a:rPr>
-              <a:t> by providing a solid platform of consolidated, historical data for analysis.</a:t>
-            </a:r>
-            <a:endParaRPr lang="en-US" sz="2200" dirty="0">
-              <a:solidFill>
-                <a:srgbClr val="7030A0"/>
-              </a:solidFill>
-              <a:latin typeface="Times New Roman" pitchFamily="18" charset="0"/>
-              <a:cs typeface="Times New Roman" pitchFamily="18" charset="0"/>
-            </a:endParaRPr>
-          </a:p>
-          <a:p>
-            <a:pPr algn="just">
-              <a:lnSpc>
-                <a:spcPct val="140000"/>
-              </a:lnSpc>
-            </a:pPr>
-            <a:r>
-              <a:rPr lang="en-US" sz="2200" dirty="0">
-                <a:solidFill>
-                  <a:srgbClr val="7030A0"/>
-                </a:solidFill>
-                <a:latin typeface="Times New Roman" pitchFamily="18" charset="0"/>
-                <a:cs typeface="Times New Roman" pitchFamily="18" charset="0"/>
-              </a:rPr>
-              <a:t>“A data warehouse is a </a:t>
-            </a:r>
-            <a:r>
-              <a:rPr lang="en-US" sz="2200" u="sng" dirty="0">
-                <a:solidFill>
-                  <a:srgbClr val="FF0000"/>
-                </a:solidFill>
-                <a:latin typeface="Times New Roman" pitchFamily="18" charset="0"/>
-                <a:cs typeface="Times New Roman" pitchFamily="18" charset="0"/>
-              </a:rPr>
-              <a:t>subject-oriented</a:t>
-            </a:r>
-            <a:r>
-              <a:rPr lang="en-US" sz="2200" dirty="0">
-                <a:solidFill>
-                  <a:srgbClr val="FF0000"/>
-                </a:solidFill>
-                <a:latin typeface="Times New Roman" pitchFamily="18" charset="0"/>
-                <a:cs typeface="Times New Roman" pitchFamily="18" charset="0"/>
-              </a:rPr>
-              <a:t>,</a:t>
-            </a:r>
-            <a:r>
-              <a:rPr lang="en-US" sz="2200" u="sng" dirty="0">
-                <a:solidFill>
-                  <a:srgbClr val="FF0000"/>
-                </a:solidFill>
-                <a:latin typeface="Times New Roman" pitchFamily="18" charset="0"/>
-                <a:cs typeface="Times New Roman" pitchFamily="18" charset="0"/>
-              </a:rPr>
-              <a:t> </a:t>
-            </a:r>
-            <a:r>
-              <a:rPr lang="en-US" sz="2200" u="sng" dirty="0">
-                <a:solidFill>
-                  <a:srgbClr val="00B0F0"/>
-                </a:solidFill>
-                <a:latin typeface="Times New Roman" pitchFamily="18" charset="0"/>
-                <a:cs typeface="Times New Roman" pitchFamily="18" charset="0"/>
-              </a:rPr>
-              <a:t>integrated</a:t>
-            </a:r>
-            <a:r>
-              <a:rPr lang="en-US" sz="2200" dirty="0">
-                <a:solidFill>
-                  <a:srgbClr val="FF0000"/>
-                </a:solidFill>
-                <a:latin typeface="Times New Roman" pitchFamily="18" charset="0"/>
-                <a:cs typeface="Times New Roman" pitchFamily="18" charset="0"/>
-              </a:rPr>
-              <a:t>, </a:t>
-            </a:r>
-            <a:r>
-              <a:rPr lang="en-US" sz="2200" u="sng" dirty="0">
-                <a:solidFill>
-                  <a:srgbClr val="FF0000"/>
-                </a:solidFill>
-                <a:latin typeface="Times New Roman" pitchFamily="18" charset="0"/>
-                <a:cs typeface="Times New Roman" pitchFamily="18" charset="0"/>
-              </a:rPr>
-              <a:t>time-variant</a:t>
-            </a:r>
-            <a:r>
-              <a:rPr lang="en-US" sz="2200" dirty="0">
-                <a:solidFill>
-                  <a:srgbClr val="FF0000"/>
-                </a:solidFill>
-                <a:latin typeface="Times New Roman" pitchFamily="18" charset="0"/>
-                <a:cs typeface="Times New Roman" pitchFamily="18" charset="0"/>
-              </a:rPr>
-              <a:t>, and </a:t>
-            </a:r>
-            <a:r>
-              <a:rPr lang="en-US" sz="2200" u="sng" dirty="0">
-                <a:solidFill>
-                  <a:srgbClr val="00B0F0"/>
-                </a:solidFill>
-                <a:latin typeface="Times New Roman" pitchFamily="18" charset="0"/>
-                <a:cs typeface="Times New Roman" pitchFamily="18" charset="0"/>
-              </a:rPr>
-              <a:t>nonvolatile</a:t>
-            </a:r>
-            <a:r>
-              <a:rPr lang="en-US" sz="2200" dirty="0">
-                <a:solidFill>
-                  <a:srgbClr val="FF0000"/>
-                </a:solidFill>
-                <a:latin typeface="Times New Roman" pitchFamily="18" charset="0"/>
-                <a:cs typeface="Times New Roman" pitchFamily="18" charset="0"/>
-              </a:rPr>
-              <a:t> </a:t>
-            </a:r>
-            <a:r>
-              <a:rPr lang="en-US" sz="2200" dirty="0">
-                <a:solidFill>
-                  <a:srgbClr val="7030A0"/>
-                </a:solidFill>
-                <a:latin typeface="Times New Roman" pitchFamily="18" charset="0"/>
-                <a:cs typeface="Times New Roman" pitchFamily="18" charset="0"/>
-              </a:rPr>
-              <a:t>collection of data in support of management’s decision-making process.”—W. H. </a:t>
-            </a:r>
-            <a:r>
-              <a:rPr lang="en-US" sz="2200" dirty="0" err="1">
-                <a:solidFill>
-                  <a:srgbClr val="7030A0"/>
-                </a:solidFill>
-                <a:latin typeface="Times New Roman" pitchFamily="18" charset="0"/>
-                <a:cs typeface="Times New Roman" pitchFamily="18" charset="0"/>
-              </a:rPr>
-              <a:t>Inmon</a:t>
-            </a:r>
-            <a:endParaRPr lang="en-US" sz="2200" dirty="0">
-              <a:solidFill>
-                <a:srgbClr val="7030A0"/>
-              </a:solidFill>
-              <a:latin typeface="Times New Roman" pitchFamily="18" charset="0"/>
-              <a:cs typeface="Times New Roman" pitchFamily="18" charset="0"/>
-            </a:endParaRPr>
-          </a:p>
-          <a:p>
-            <a:pPr algn="just">
-              <a:lnSpc>
-                <a:spcPct val="140000"/>
-              </a:lnSpc>
-            </a:pPr>
-            <a:r>
-              <a:rPr lang="en-US" sz="2200" dirty="0">
-                <a:latin typeface="Times New Roman" pitchFamily="18" charset="0"/>
-                <a:cs typeface="Times New Roman" pitchFamily="18" charset="0"/>
-              </a:rPr>
-              <a:t>Data warehousing:</a:t>
-            </a:r>
-          </a:p>
-          <a:p>
-            <a:pPr lvl="1" algn="just">
-              <a:lnSpc>
-                <a:spcPct val="140000"/>
-              </a:lnSpc>
-            </a:pPr>
-            <a:r>
-              <a:rPr lang="en-US" sz="2200" dirty="0">
-                <a:latin typeface="Times New Roman" pitchFamily="18" charset="0"/>
-                <a:cs typeface="Times New Roman" pitchFamily="18" charset="0"/>
-              </a:rPr>
-              <a:t>The process of constructing and using data warehouses</a:t>
-            </a:r>
-          </a:p>
-        </p:txBody>
-      </p:sp>
-    </p:spTree>
-    <p:extLst>
-      <p:ext uri="{BB962C8B-B14F-4D97-AF65-F5344CB8AC3E}">
-        <p14:creationId xmlns:p14="http://schemas.microsoft.com/office/powerpoint/2010/main" val="1833917524"/>
-      </p:ext>
-    </p:extLst>
-  </p:cSld>
-  <p:clrMapOvr>
-    <a:masterClrMapping/>
-  </p:clrMapOvr>
-</p:sld>
-</file>
-
-<file path=ppt/slides/slide40.xml><?xml version="1.0" encoding="utf-8"?>
+<file path=ppt/slides/slide43.xml><?xml version="1.0" encoding="utf-8"?>
 <p:sld xmlns:a="http://schemas.openxmlformats.org/drawingml/2006/main" xmlns:r="http://schemas.openxmlformats.org/officeDocument/2006/relationships" xmlns:p="http://schemas.openxmlformats.org/presentationml/2006/main">
   <p:cSld>
     <p:spTree>
@@ -15642,7 +15903,7 @@
 </p:sld>
 </file>
 
-<file path=ppt/slides/slide41.xml><?xml version="1.0" encoding="utf-8"?>
+<file path=ppt/slides/slide44.xml><?xml version="1.0" encoding="utf-8"?>
 <p:sld xmlns:a="http://schemas.openxmlformats.org/drawingml/2006/main" xmlns:r="http://schemas.openxmlformats.org/officeDocument/2006/relationships" xmlns:p="http://schemas.openxmlformats.org/presentationml/2006/main">
   <p:cSld>
     <p:spTree>
@@ -15902,7 +16163,7 @@
 </p:sld>
 </file>
 
-<file path=ppt/slides/slide42.xml><?xml version="1.0" encoding="utf-8"?>
+<file path=ppt/slides/slide45.xml><?xml version="1.0" encoding="utf-8"?>
 <p:sld xmlns:a="http://schemas.openxmlformats.org/drawingml/2006/main" xmlns:r="http://schemas.openxmlformats.org/officeDocument/2006/relationships" xmlns:p="http://schemas.openxmlformats.org/presentationml/2006/main">
   <p:cSld>
     <p:spTree>
@@ -16071,7 +16332,7 @@
 </p:sld>
 </file>
 
-<file path=ppt/slides/slide43.xml><?xml version="1.0" encoding="utf-8"?>
+<file path=ppt/slides/slide46.xml><?xml version="1.0" encoding="utf-8"?>
 <p:sld xmlns:a="http://schemas.openxmlformats.org/drawingml/2006/main" xmlns:r="http://schemas.openxmlformats.org/officeDocument/2006/relationships" xmlns:p="http://schemas.openxmlformats.org/presentationml/2006/main">
   <p:cSld>
     <p:spTree>
@@ -16240,7 +16501,7 @@
 </p:sld>
 </file>
 
-<file path=ppt/slides/slide44.xml><?xml version="1.0" encoding="utf-8"?>
+<file path=ppt/slides/slide47.xml><?xml version="1.0" encoding="utf-8"?>
 <p:sld xmlns:a="http://schemas.openxmlformats.org/drawingml/2006/main" xmlns:r="http://schemas.openxmlformats.org/officeDocument/2006/relationships" xmlns:p="http://schemas.openxmlformats.org/presentationml/2006/main">
   <p:cSld>
     <p:spTree>
@@ -16459,7 +16720,7 @@
 </p:sld>
 </file>
 
-<file path=ppt/slides/slide45.xml><?xml version="1.0" encoding="utf-8"?>
+<file path=ppt/slides/slide48.xml><?xml version="1.0" encoding="utf-8"?>
 <p:sld xmlns:a="http://schemas.openxmlformats.org/drawingml/2006/main" xmlns:r="http://schemas.openxmlformats.org/officeDocument/2006/relationships" xmlns:p="http://schemas.openxmlformats.org/presentationml/2006/main">
   <p:cSld>
     <p:spTree>
@@ -16583,7 +16844,7 @@
 </p:sld>
 </file>
 
-<file path=ppt/slides/slide46.xml><?xml version="1.0" encoding="utf-8"?>
+<file path=ppt/slides/slide49.xml><?xml version="1.0" encoding="utf-8"?>
 <p:sld xmlns:a="http://schemas.openxmlformats.org/drawingml/2006/main" xmlns:r="http://schemas.openxmlformats.org/officeDocument/2006/relationships" xmlns:p="http://schemas.openxmlformats.org/presentationml/2006/main">
   <p:cSld>
     <p:spTree>
@@ -16704,532 +16965,6 @@
     <p:extLst>
       <p:ext uri="{BB962C8B-B14F-4D97-AF65-F5344CB8AC3E}">
         <p14:creationId xmlns:p14="http://schemas.microsoft.com/office/powerpoint/2010/main" val="798965593"/>
-      </p:ext>
-    </p:extLst>
-  </p:cSld>
-  <p:clrMapOvr>
-    <a:masterClrMapping/>
-  </p:clrMapOvr>
-</p:sld>
-</file>
-
-<file path=ppt/slides/slide47.xml><?xml version="1.0" encoding="utf-8"?>
-<p:sld xmlns:a="http://schemas.openxmlformats.org/drawingml/2006/main" xmlns:r="http://schemas.openxmlformats.org/officeDocument/2006/relationships" xmlns:p="http://schemas.openxmlformats.org/presentationml/2006/main">
-  <p:cSld>
-    <p:spTree>
-      <p:nvGrpSpPr>
-        <p:cNvPr id="1" name=""/>
-        <p:cNvGrpSpPr/>
-        <p:nvPr/>
-      </p:nvGrpSpPr>
-      <p:grpSpPr>
-        <a:xfrm>
-          <a:off x="0" y="0"/>
-          <a:ext cx="0" cy="0"/>
-          <a:chOff x="0" y="0"/>
-          <a:chExt cx="0" cy="0"/>
-        </a:xfrm>
-      </p:grpSpPr>
-      <p:sp>
-        <p:nvSpPr>
-          <p:cNvPr id="2" name="Rectangle 1"/>
-          <p:cNvSpPr/>
-          <p:nvPr/>
-        </p:nvSpPr>
-        <p:spPr>
-          <a:xfrm>
-            <a:off x="228600" y="152401"/>
-            <a:ext cx="8763000" cy="5816977"/>
-          </a:xfrm>
-          <a:prstGeom prst="rect">
-            <a:avLst/>
-          </a:prstGeom>
-        </p:spPr>
-        <p:txBody>
-          <a:bodyPr wrap="square">
-            <a:spAutoFit/>
-          </a:bodyPr>
-          <a:lstStyle/>
-          <a:p>
-            <a:pPr algn="just"/>
-            <a:r>
-              <a:rPr lang="en-US" sz="2400" dirty="0">
-                <a:solidFill>
-                  <a:srgbClr val="FF0000"/>
-                </a:solidFill>
-                <a:latin typeface="Times New Roman" pitchFamily="18" charset="0"/>
-                <a:cs typeface="Times New Roman" pitchFamily="18" charset="0"/>
-              </a:rPr>
-              <a:t>From Online Analytical Processing to Multidimensional Data Mining: </a:t>
-            </a:r>
-          </a:p>
-          <a:p>
-            <a:pPr algn="just"/>
-            <a:r>
-              <a:rPr lang="en-US" sz="2200" dirty="0">
-                <a:latin typeface="Times New Roman" pitchFamily="18" charset="0"/>
-                <a:cs typeface="Times New Roman" pitchFamily="18" charset="0"/>
-              </a:rPr>
-              <a:t>	The data mining field has conducted substantial research regarding mining on various data types, including relational data, data from data warehouses, transaction data, time-series data, spatial data, text data, and flat files. </a:t>
-            </a:r>
-          </a:p>
-          <a:p>
-            <a:pPr algn="just"/>
-            <a:r>
-              <a:rPr lang="en-US" sz="2200" dirty="0">
-                <a:latin typeface="Times New Roman" pitchFamily="18" charset="0"/>
-                <a:cs typeface="Times New Roman" pitchFamily="18" charset="0"/>
-              </a:rPr>
-              <a:t>	Multidimensional data mining integrates OLAP with data mining to uncover knowledge in multidimensional databases. Among the many different paradigms and architectures of data mining systems, multidimensional data mining is particularly important for the following reasons:</a:t>
-            </a:r>
-          </a:p>
-          <a:p>
-            <a:pPr algn="just"/>
-            <a:endParaRPr lang="en-US" sz="2200" dirty="0">
-              <a:latin typeface="Times New Roman" pitchFamily="18" charset="0"/>
-              <a:cs typeface="Times New Roman" pitchFamily="18" charset="0"/>
-            </a:endParaRPr>
-          </a:p>
-          <a:p>
-            <a:pPr marL="400050" indent="-400050" algn="just">
-              <a:buAutoNum type="romanLcPeriod"/>
-            </a:pPr>
-            <a:r>
-              <a:rPr lang="en-US" sz="2200" dirty="0">
-                <a:latin typeface="Times New Roman" pitchFamily="18" charset="0"/>
-                <a:cs typeface="Times New Roman" pitchFamily="18" charset="0"/>
-              </a:rPr>
-              <a:t>High quality of data in data warehouses</a:t>
-            </a:r>
-          </a:p>
-          <a:p>
-            <a:pPr marL="400050" indent="-400050" algn="just">
-              <a:buAutoNum type="romanLcPeriod"/>
-            </a:pPr>
-            <a:r>
-              <a:rPr lang="en-US" sz="2200" dirty="0">
-                <a:latin typeface="Times New Roman" pitchFamily="18" charset="0"/>
-                <a:cs typeface="Times New Roman" pitchFamily="18" charset="0"/>
-              </a:rPr>
-              <a:t>Available information processing infrastructure surrounding data warehouses</a:t>
-            </a:r>
-          </a:p>
-          <a:p>
-            <a:pPr marL="400050" indent="-400050" algn="just">
-              <a:buAutoNum type="romanLcPeriod"/>
-            </a:pPr>
-            <a:r>
-              <a:rPr lang="en-US" sz="2200" dirty="0">
-                <a:latin typeface="Times New Roman" pitchFamily="18" charset="0"/>
-                <a:cs typeface="Times New Roman" pitchFamily="18" charset="0"/>
-              </a:rPr>
-              <a:t>OLAP-based exploration of multidimensional data</a:t>
-            </a:r>
-          </a:p>
-          <a:p>
-            <a:pPr marL="400050" indent="-400050" algn="just">
-              <a:buAutoNum type="romanLcPeriod"/>
-            </a:pPr>
-            <a:r>
-              <a:rPr lang="en-US" sz="2200" dirty="0">
-                <a:latin typeface="Times New Roman" pitchFamily="18" charset="0"/>
-                <a:cs typeface="Times New Roman" pitchFamily="18" charset="0"/>
-              </a:rPr>
-              <a:t>Online selection of data mining functions</a:t>
-            </a:r>
-          </a:p>
-          <a:p>
-            <a:pPr marL="400050" indent="-400050">
-              <a:buAutoNum type="romanLcPeriod"/>
-            </a:pPr>
-            <a:endParaRPr lang="en-IN" dirty="0"/>
-          </a:p>
-        </p:txBody>
-      </p:sp>
-    </p:spTree>
-    <p:extLst>
-      <p:ext uri="{BB962C8B-B14F-4D97-AF65-F5344CB8AC3E}">
-        <p14:creationId xmlns:p14="http://schemas.microsoft.com/office/powerpoint/2010/main" val="2694751117"/>
-      </p:ext>
-    </p:extLst>
-  </p:cSld>
-  <p:clrMapOvr>
-    <a:masterClrMapping/>
-  </p:clrMapOvr>
-</p:sld>
-</file>
-
-<file path=ppt/slides/slide48.xml><?xml version="1.0" encoding="utf-8"?>
-<p:sld xmlns:a="http://schemas.openxmlformats.org/drawingml/2006/main" xmlns:r="http://schemas.openxmlformats.org/officeDocument/2006/relationships" xmlns:p="http://schemas.openxmlformats.org/presentationml/2006/main">
-  <p:cSld>
-    <p:spTree>
-      <p:nvGrpSpPr>
-        <p:cNvPr id="1" name=""/>
-        <p:cNvGrpSpPr/>
-        <p:nvPr/>
-      </p:nvGrpSpPr>
-      <p:grpSpPr>
-        <a:xfrm>
-          <a:off x="0" y="0"/>
-          <a:ext cx="0" cy="0"/>
-          <a:chOff x="0" y="0"/>
-          <a:chExt cx="0" cy="0"/>
-        </a:xfrm>
-      </p:grpSpPr>
-      <p:sp>
-        <p:nvSpPr>
-          <p:cNvPr id="2" name="Rectangle 1"/>
-          <p:cNvSpPr/>
-          <p:nvPr/>
-        </p:nvSpPr>
-        <p:spPr>
-          <a:xfrm>
-            <a:off x="228600" y="152400"/>
-            <a:ext cx="8686800" cy="6555641"/>
-          </a:xfrm>
-          <a:prstGeom prst="rect">
-            <a:avLst/>
-          </a:prstGeom>
-        </p:spPr>
-        <p:txBody>
-          <a:bodyPr wrap="square">
-            <a:spAutoFit/>
-          </a:bodyPr>
-          <a:lstStyle/>
-          <a:p>
-            <a:pPr algn="ctr"/>
-            <a:r>
-              <a:rPr lang="en-US" sz="2400" u="sng" dirty="0">
-                <a:solidFill>
-                  <a:srgbClr val="FF0000"/>
-                </a:solidFill>
-                <a:latin typeface="Times New Roman" pitchFamily="18" charset="0"/>
-                <a:cs typeface="Times New Roman" pitchFamily="18" charset="0"/>
-              </a:rPr>
-              <a:t>Data Warehouse Implementation </a:t>
-            </a:r>
-          </a:p>
-          <a:p>
-            <a:pPr algn="just"/>
-            <a:r>
-              <a:rPr lang="en-US" sz="2200" dirty="0">
-                <a:latin typeface="Times New Roman" pitchFamily="18" charset="0"/>
-                <a:cs typeface="Times New Roman" pitchFamily="18" charset="0"/>
-              </a:rPr>
-              <a:t>	Data warehouses contain huge volumes of data. OLAP servers demand that decision support queries be answered in the order of seconds. Therefore, it is crucial for data warehouse systems to support highly efficient cube computation techniques, access methods, and query processing techniques.</a:t>
-            </a:r>
-          </a:p>
-          <a:p>
-            <a:pPr algn="just"/>
-            <a:endParaRPr lang="en-US" sz="2200" dirty="0">
-              <a:latin typeface="Times New Roman" pitchFamily="18" charset="0"/>
-              <a:cs typeface="Times New Roman" pitchFamily="18" charset="0"/>
-            </a:endParaRPr>
-          </a:p>
-          <a:p>
-            <a:pPr algn="just"/>
-            <a:r>
-              <a:rPr lang="en-US" sz="2200" b="1" dirty="0">
-                <a:latin typeface="Times New Roman" pitchFamily="18" charset="0"/>
-                <a:cs typeface="Times New Roman" pitchFamily="18" charset="0"/>
-              </a:rPr>
-              <a:t>Efficient Data Cube Computation: An Overview</a:t>
-            </a:r>
-          </a:p>
-          <a:p>
-            <a:pPr algn="just"/>
-            <a:r>
-              <a:rPr lang="en-US" dirty="0"/>
-              <a:t>	</a:t>
-            </a:r>
-            <a:r>
-              <a:rPr lang="en-US" sz="2200" dirty="0">
-                <a:latin typeface="Times New Roman" pitchFamily="18" charset="0"/>
-                <a:cs typeface="Times New Roman" pitchFamily="18" charset="0"/>
-              </a:rPr>
-              <a:t>Multidimensional data analysis is the efficient computation of aggregations across many sets of dimensions. In SQL terms, these aggregations are referred to as group-</a:t>
-            </a:r>
-            <a:r>
-              <a:rPr lang="en-US" sz="2200" dirty="0" err="1">
-                <a:latin typeface="Times New Roman" pitchFamily="18" charset="0"/>
-                <a:cs typeface="Times New Roman" pitchFamily="18" charset="0"/>
-              </a:rPr>
-              <a:t>by’s</a:t>
-            </a:r>
-            <a:r>
-              <a:rPr lang="en-US" sz="2200" dirty="0">
-                <a:latin typeface="Times New Roman" pitchFamily="18" charset="0"/>
-                <a:cs typeface="Times New Roman" pitchFamily="18" charset="0"/>
-              </a:rPr>
-              <a:t>. Each group-by can be represented by a cuboid, where the set of group-</a:t>
-            </a:r>
-            <a:r>
-              <a:rPr lang="en-US" sz="2200" dirty="0" err="1">
-                <a:latin typeface="Times New Roman" pitchFamily="18" charset="0"/>
-                <a:cs typeface="Times New Roman" pitchFamily="18" charset="0"/>
-              </a:rPr>
-              <a:t>by’s</a:t>
-            </a:r>
-            <a:r>
-              <a:rPr lang="en-US" sz="2200" dirty="0">
-                <a:latin typeface="Times New Roman" pitchFamily="18" charset="0"/>
-                <a:cs typeface="Times New Roman" pitchFamily="18" charset="0"/>
-              </a:rPr>
-              <a:t> forms a lattice of cuboids defining a data cube. The issues relating to the efficient computation of data cubes are:</a:t>
-            </a:r>
-          </a:p>
-          <a:p>
-            <a:pPr algn="just"/>
-            <a:endParaRPr lang="en-US" sz="2200" dirty="0">
-              <a:latin typeface="Times New Roman" pitchFamily="18" charset="0"/>
-              <a:cs typeface="Times New Roman" pitchFamily="18" charset="0"/>
-            </a:endParaRPr>
-          </a:p>
-          <a:p>
-            <a:pPr algn="just"/>
-            <a:r>
-              <a:rPr lang="en-US" sz="2200" b="1" dirty="0">
-                <a:solidFill>
-                  <a:srgbClr val="00B050"/>
-                </a:solidFill>
-                <a:latin typeface="Times New Roman" pitchFamily="18" charset="0"/>
-                <a:cs typeface="Times New Roman" pitchFamily="18" charset="0"/>
-              </a:rPr>
-              <a:t>The compute cube Operator and the Curse of Dimensionality:</a:t>
-            </a:r>
-          </a:p>
-          <a:p>
-            <a:pPr algn="just"/>
-            <a:r>
-              <a:rPr lang="en-US" sz="2200" dirty="0">
-                <a:latin typeface="Times New Roman" pitchFamily="18" charset="0"/>
-                <a:cs typeface="Times New Roman" pitchFamily="18" charset="0"/>
-              </a:rPr>
-              <a:t>	The compute cube operator computes aggregates over all subsets of the dimensions specified in the operation. This can require excessive storage space, especially for large numbers of dimensions.</a:t>
-            </a:r>
-            <a:endParaRPr lang="en-IN" sz="2200" dirty="0">
-              <a:latin typeface="Times New Roman" pitchFamily="18" charset="0"/>
-              <a:cs typeface="Times New Roman" pitchFamily="18" charset="0"/>
-            </a:endParaRPr>
-          </a:p>
-        </p:txBody>
-      </p:sp>
-    </p:spTree>
-    <p:extLst>
-      <p:ext uri="{BB962C8B-B14F-4D97-AF65-F5344CB8AC3E}">
-        <p14:creationId xmlns:p14="http://schemas.microsoft.com/office/powerpoint/2010/main" val="3094296480"/>
-      </p:ext>
-    </p:extLst>
-  </p:cSld>
-  <p:clrMapOvr>
-    <a:masterClrMapping/>
-  </p:clrMapOvr>
-</p:sld>
-</file>
-
-<file path=ppt/slides/slide49.xml><?xml version="1.0" encoding="utf-8"?>
-<p:sld xmlns:a="http://schemas.openxmlformats.org/drawingml/2006/main" xmlns:r="http://schemas.openxmlformats.org/officeDocument/2006/relationships" xmlns:p="http://schemas.openxmlformats.org/presentationml/2006/main">
-  <p:cSld>
-    <p:spTree>
-      <p:nvGrpSpPr>
-        <p:cNvPr id="1" name=""/>
-        <p:cNvGrpSpPr/>
-        <p:nvPr/>
-      </p:nvGrpSpPr>
-      <p:grpSpPr>
-        <a:xfrm>
-          <a:off x="0" y="0"/>
-          <a:ext cx="0" cy="0"/>
-          <a:chOff x="0" y="0"/>
-          <a:chExt cx="0" cy="0"/>
-        </a:xfrm>
-      </p:grpSpPr>
-      <p:sp>
-        <p:nvSpPr>
-          <p:cNvPr id="2" name="Rectangle 1"/>
-          <p:cNvSpPr/>
-          <p:nvPr/>
-        </p:nvSpPr>
-        <p:spPr>
-          <a:xfrm>
-            <a:off x="228600" y="152400"/>
-            <a:ext cx="8686800" cy="5509200"/>
-          </a:xfrm>
-          <a:prstGeom prst="rect">
-            <a:avLst/>
-          </a:prstGeom>
-        </p:spPr>
-        <p:txBody>
-          <a:bodyPr wrap="square">
-            <a:spAutoFit/>
-          </a:bodyPr>
-          <a:lstStyle/>
-          <a:p>
-            <a:pPr algn="just"/>
-            <a:r>
-              <a:rPr lang="en-US" sz="2200" b="1" dirty="0">
-                <a:latin typeface="Times New Roman" pitchFamily="18" charset="0"/>
-                <a:cs typeface="Times New Roman" pitchFamily="18" charset="0"/>
-              </a:rPr>
-              <a:t>Example:  </a:t>
-            </a:r>
-            <a:r>
-              <a:rPr lang="en-US" sz="2200" dirty="0">
-                <a:latin typeface="Times New Roman" pitchFamily="18" charset="0"/>
-                <a:cs typeface="Times New Roman" pitchFamily="18" charset="0"/>
-              </a:rPr>
-              <a:t>A data cube is a lattice of cuboids. Suppose that you want to create a data cube for </a:t>
-            </a:r>
-            <a:r>
-              <a:rPr lang="en-US" sz="2200" dirty="0" err="1">
-                <a:latin typeface="Times New Roman" pitchFamily="18" charset="0"/>
-                <a:cs typeface="Times New Roman" pitchFamily="18" charset="0"/>
-              </a:rPr>
-              <a:t>AllElectronics</a:t>
-            </a:r>
-            <a:r>
-              <a:rPr lang="en-US" sz="2200" dirty="0">
-                <a:latin typeface="Times New Roman" pitchFamily="18" charset="0"/>
-                <a:cs typeface="Times New Roman" pitchFamily="18" charset="0"/>
-              </a:rPr>
-              <a:t> sales that contains the following: city, item, year, and sales in dollars. You want to be able to analyze the data, with queries such as the following: </a:t>
-            </a:r>
-          </a:p>
-          <a:p>
-            <a:pPr marL="514350" indent="-514350" algn="just">
-              <a:buFont typeface="+mj-lt"/>
-              <a:buAutoNum type="romanLcPeriod"/>
-            </a:pPr>
-            <a:r>
-              <a:rPr lang="en-US" sz="2200" dirty="0">
-                <a:latin typeface="Times New Roman" pitchFamily="18" charset="0"/>
-                <a:cs typeface="Times New Roman" pitchFamily="18" charset="0"/>
-              </a:rPr>
-              <a:t>“Compute the sum of sales, grouping by city and item.” </a:t>
-            </a:r>
-          </a:p>
-          <a:p>
-            <a:pPr marL="514350" indent="-514350" algn="just">
-              <a:buFont typeface="+mj-lt"/>
-              <a:buAutoNum type="romanLcPeriod"/>
-            </a:pPr>
-            <a:r>
-              <a:rPr lang="en-US" sz="2200" dirty="0">
-                <a:latin typeface="Times New Roman" pitchFamily="18" charset="0"/>
-                <a:cs typeface="Times New Roman" pitchFamily="18" charset="0"/>
-              </a:rPr>
-              <a:t>“Compute the sum of sales, grouping by city.” </a:t>
-            </a:r>
-          </a:p>
-          <a:p>
-            <a:pPr marL="514350" indent="-514350" algn="just">
-              <a:buFont typeface="+mj-lt"/>
-              <a:buAutoNum type="romanLcPeriod"/>
-            </a:pPr>
-            <a:r>
-              <a:rPr lang="en-US" sz="2200" dirty="0">
-                <a:latin typeface="Times New Roman" pitchFamily="18" charset="0"/>
-                <a:cs typeface="Times New Roman" pitchFamily="18" charset="0"/>
-              </a:rPr>
-              <a:t>“Compute the sum of sales, grouping by item.”</a:t>
-            </a:r>
-          </a:p>
-          <a:p>
-            <a:pPr algn="just"/>
-            <a:endParaRPr lang="en-US" sz="2200" dirty="0">
-              <a:latin typeface="Times New Roman" pitchFamily="18" charset="0"/>
-              <a:cs typeface="Times New Roman" pitchFamily="18" charset="0"/>
-            </a:endParaRPr>
-          </a:p>
-          <a:p>
-            <a:pPr algn="just"/>
-            <a:r>
-              <a:rPr lang="en-US" sz="2200" dirty="0">
-                <a:latin typeface="Times New Roman" pitchFamily="18" charset="0"/>
-                <a:cs typeface="Times New Roman" pitchFamily="18" charset="0"/>
-              </a:rPr>
-              <a:t>Taking the three attributes, city, item, and year, as the dimensions for the data cube, and sales in dollars as the measure, the total number of cuboids, or group </a:t>
-            </a:r>
-            <a:r>
-              <a:rPr lang="en-US" sz="2200" dirty="0" err="1">
-                <a:latin typeface="Times New Roman" pitchFamily="18" charset="0"/>
-                <a:cs typeface="Times New Roman" pitchFamily="18" charset="0"/>
-              </a:rPr>
-              <a:t>by’s</a:t>
-            </a:r>
-            <a:r>
-              <a:rPr lang="en-US" sz="2200" dirty="0">
-                <a:latin typeface="Times New Roman" pitchFamily="18" charset="0"/>
-                <a:cs typeface="Times New Roman" pitchFamily="18" charset="0"/>
-              </a:rPr>
-              <a:t>, that can be computed for this data cube is 2</a:t>
-            </a:r>
-            <a:r>
-              <a:rPr lang="en-US" sz="2200" baseline="30000" dirty="0">
-                <a:latin typeface="Times New Roman" pitchFamily="18" charset="0"/>
-                <a:cs typeface="Times New Roman" pitchFamily="18" charset="0"/>
-              </a:rPr>
-              <a:t>3</a:t>
-            </a:r>
-            <a:r>
-              <a:rPr lang="en-US" sz="2200" dirty="0">
-                <a:latin typeface="Times New Roman" pitchFamily="18" charset="0"/>
-                <a:cs typeface="Times New Roman" pitchFamily="18" charset="0"/>
-              </a:rPr>
-              <a:t> = 8. </a:t>
-            </a:r>
-          </a:p>
-          <a:p>
-            <a:pPr algn="just"/>
-            <a:endParaRPr lang="en-US" sz="2200" dirty="0">
-              <a:latin typeface="Times New Roman" pitchFamily="18" charset="0"/>
-              <a:cs typeface="Times New Roman" pitchFamily="18" charset="0"/>
-            </a:endParaRPr>
-          </a:p>
-          <a:p>
-            <a:pPr algn="just"/>
-            <a:r>
-              <a:rPr lang="en-US" sz="2200" dirty="0">
-                <a:latin typeface="Times New Roman" pitchFamily="18" charset="0"/>
-                <a:cs typeface="Times New Roman" pitchFamily="18" charset="0"/>
-              </a:rPr>
-              <a:t>	The possible group-</a:t>
-            </a:r>
-            <a:r>
-              <a:rPr lang="en-US" sz="2200" dirty="0" err="1">
-                <a:latin typeface="Times New Roman" pitchFamily="18" charset="0"/>
-                <a:cs typeface="Times New Roman" pitchFamily="18" charset="0"/>
-              </a:rPr>
-              <a:t>by’s</a:t>
-            </a:r>
-            <a:r>
-              <a:rPr lang="en-US" sz="2200" dirty="0">
-                <a:latin typeface="Times New Roman" pitchFamily="18" charset="0"/>
-                <a:cs typeface="Times New Roman" pitchFamily="18" charset="0"/>
-              </a:rPr>
-              <a:t> are the following: {(city, item, year), (city, item), (city, year), (item, year), (city), (item), (year), ()} where () means that the group-by is empty. These group-</a:t>
-            </a:r>
-            <a:r>
-              <a:rPr lang="en-US" sz="2200" dirty="0" err="1">
-                <a:latin typeface="Times New Roman" pitchFamily="18" charset="0"/>
-                <a:cs typeface="Times New Roman" pitchFamily="18" charset="0"/>
-              </a:rPr>
-              <a:t>by’s</a:t>
-            </a:r>
-            <a:r>
-              <a:rPr lang="en-US" sz="2200" dirty="0">
-                <a:latin typeface="Times New Roman" pitchFamily="18" charset="0"/>
-                <a:cs typeface="Times New Roman" pitchFamily="18" charset="0"/>
-              </a:rPr>
-              <a:t> form a lattice of cuboids for the data cube, as shown in Figure.</a:t>
-            </a:r>
-          </a:p>
-        </p:txBody>
-      </p:sp>
-    </p:spTree>
-    <p:extLst>
-      <p:ext uri="{BB962C8B-B14F-4D97-AF65-F5344CB8AC3E}">
-        <p14:creationId xmlns:p14="http://schemas.microsoft.com/office/powerpoint/2010/main" val="1675867461"/>
       </p:ext>
     </p:extLst>
   </p:cSld>
@@ -17648,6 +17383,532 @@
           <a:chExt cx="0" cy="0"/>
         </a:xfrm>
       </p:grpSpPr>
+      <p:sp>
+        <p:nvSpPr>
+          <p:cNvPr id="2" name="Rectangle 1"/>
+          <p:cNvSpPr/>
+          <p:nvPr/>
+        </p:nvSpPr>
+        <p:spPr>
+          <a:xfrm>
+            <a:off x="228600" y="152401"/>
+            <a:ext cx="8763000" cy="5816977"/>
+          </a:xfrm>
+          <a:prstGeom prst="rect">
+            <a:avLst/>
+          </a:prstGeom>
+        </p:spPr>
+        <p:txBody>
+          <a:bodyPr wrap="square">
+            <a:spAutoFit/>
+          </a:bodyPr>
+          <a:lstStyle/>
+          <a:p>
+            <a:pPr algn="just"/>
+            <a:r>
+              <a:rPr lang="en-US" sz="2400" dirty="0">
+                <a:solidFill>
+                  <a:srgbClr val="FF0000"/>
+                </a:solidFill>
+                <a:latin typeface="Times New Roman" pitchFamily="18" charset="0"/>
+                <a:cs typeface="Times New Roman" pitchFamily="18" charset="0"/>
+              </a:rPr>
+              <a:t>From Online Analytical Processing to Multidimensional Data Mining: </a:t>
+            </a:r>
+          </a:p>
+          <a:p>
+            <a:pPr algn="just"/>
+            <a:r>
+              <a:rPr lang="en-US" sz="2200" dirty="0">
+                <a:latin typeface="Times New Roman" pitchFamily="18" charset="0"/>
+                <a:cs typeface="Times New Roman" pitchFamily="18" charset="0"/>
+              </a:rPr>
+              <a:t>	The data mining field has conducted substantial research regarding mining on various data types, including relational data, data from data warehouses, transaction data, time-series data, spatial data, text data, and flat files. </a:t>
+            </a:r>
+          </a:p>
+          <a:p>
+            <a:pPr algn="just"/>
+            <a:r>
+              <a:rPr lang="en-US" sz="2200" dirty="0">
+                <a:latin typeface="Times New Roman" pitchFamily="18" charset="0"/>
+                <a:cs typeface="Times New Roman" pitchFamily="18" charset="0"/>
+              </a:rPr>
+              <a:t>	Multidimensional data mining integrates OLAP with data mining to uncover knowledge in multidimensional databases. Among the many different paradigms and architectures of data mining systems, multidimensional data mining is particularly important for the following reasons:</a:t>
+            </a:r>
+          </a:p>
+          <a:p>
+            <a:pPr algn="just"/>
+            <a:endParaRPr lang="en-US" sz="2200" dirty="0">
+              <a:latin typeface="Times New Roman" pitchFamily="18" charset="0"/>
+              <a:cs typeface="Times New Roman" pitchFamily="18" charset="0"/>
+            </a:endParaRPr>
+          </a:p>
+          <a:p>
+            <a:pPr marL="400050" indent="-400050" algn="just">
+              <a:buAutoNum type="romanLcPeriod"/>
+            </a:pPr>
+            <a:r>
+              <a:rPr lang="en-US" sz="2200" dirty="0">
+                <a:latin typeface="Times New Roman" pitchFamily="18" charset="0"/>
+                <a:cs typeface="Times New Roman" pitchFamily="18" charset="0"/>
+              </a:rPr>
+              <a:t>High quality of data in data warehouses</a:t>
+            </a:r>
+          </a:p>
+          <a:p>
+            <a:pPr marL="400050" indent="-400050" algn="just">
+              <a:buAutoNum type="romanLcPeriod"/>
+            </a:pPr>
+            <a:r>
+              <a:rPr lang="en-US" sz="2200" dirty="0">
+                <a:latin typeface="Times New Roman" pitchFamily="18" charset="0"/>
+                <a:cs typeface="Times New Roman" pitchFamily="18" charset="0"/>
+              </a:rPr>
+              <a:t>Available information processing infrastructure surrounding data warehouses</a:t>
+            </a:r>
+          </a:p>
+          <a:p>
+            <a:pPr marL="400050" indent="-400050" algn="just">
+              <a:buAutoNum type="romanLcPeriod"/>
+            </a:pPr>
+            <a:r>
+              <a:rPr lang="en-US" sz="2200" dirty="0">
+                <a:latin typeface="Times New Roman" pitchFamily="18" charset="0"/>
+                <a:cs typeface="Times New Roman" pitchFamily="18" charset="0"/>
+              </a:rPr>
+              <a:t>OLAP-based exploration of multidimensional data</a:t>
+            </a:r>
+          </a:p>
+          <a:p>
+            <a:pPr marL="400050" indent="-400050" algn="just">
+              <a:buAutoNum type="romanLcPeriod"/>
+            </a:pPr>
+            <a:r>
+              <a:rPr lang="en-US" sz="2200" dirty="0">
+                <a:latin typeface="Times New Roman" pitchFamily="18" charset="0"/>
+                <a:cs typeface="Times New Roman" pitchFamily="18" charset="0"/>
+              </a:rPr>
+              <a:t>Online selection of data mining functions</a:t>
+            </a:r>
+          </a:p>
+          <a:p>
+            <a:pPr marL="400050" indent="-400050">
+              <a:buAutoNum type="romanLcPeriod"/>
+            </a:pPr>
+            <a:endParaRPr lang="en-IN" dirty="0"/>
+          </a:p>
+        </p:txBody>
+      </p:sp>
+    </p:spTree>
+    <p:extLst>
+      <p:ext uri="{BB962C8B-B14F-4D97-AF65-F5344CB8AC3E}">
+        <p14:creationId xmlns:p14="http://schemas.microsoft.com/office/powerpoint/2010/main" val="2694751117"/>
+      </p:ext>
+    </p:extLst>
+  </p:cSld>
+  <p:clrMapOvr>
+    <a:masterClrMapping/>
+  </p:clrMapOvr>
+</p:sld>
+</file>
+
+<file path=ppt/slides/slide51.xml><?xml version="1.0" encoding="utf-8"?>
+<p:sld xmlns:a="http://schemas.openxmlformats.org/drawingml/2006/main" xmlns:r="http://schemas.openxmlformats.org/officeDocument/2006/relationships" xmlns:p="http://schemas.openxmlformats.org/presentationml/2006/main">
+  <p:cSld>
+    <p:spTree>
+      <p:nvGrpSpPr>
+        <p:cNvPr id="1" name=""/>
+        <p:cNvGrpSpPr/>
+        <p:nvPr/>
+      </p:nvGrpSpPr>
+      <p:grpSpPr>
+        <a:xfrm>
+          <a:off x="0" y="0"/>
+          <a:ext cx="0" cy="0"/>
+          <a:chOff x="0" y="0"/>
+          <a:chExt cx="0" cy="0"/>
+        </a:xfrm>
+      </p:grpSpPr>
+      <p:sp>
+        <p:nvSpPr>
+          <p:cNvPr id="2" name="Rectangle 1"/>
+          <p:cNvSpPr/>
+          <p:nvPr/>
+        </p:nvSpPr>
+        <p:spPr>
+          <a:xfrm>
+            <a:off x="228600" y="152400"/>
+            <a:ext cx="8686800" cy="6555641"/>
+          </a:xfrm>
+          <a:prstGeom prst="rect">
+            <a:avLst/>
+          </a:prstGeom>
+        </p:spPr>
+        <p:txBody>
+          <a:bodyPr wrap="square">
+            <a:spAutoFit/>
+          </a:bodyPr>
+          <a:lstStyle/>
+          <a:p>
+            <a:pPr algn="ctr"/>
+            <a:r>
+              <a:rPr lang="en-US" sz="2400" u="sng" dirty="0">
+                <a:solidFill>
+                  <a:srgbClr val="FF0000"/>
+                </a:solidFill>
+                <a:latin typeface="Times New Roman" pitchFamily="18" charset="0"/>
+                <a:cs typeface="Times New Roman" pitchFamily="18" charset="0"/>
+              </a:rPr>
+              <a:t>Data Warehouse Implementation </a:t>
+            </a:r>
+          </a:p>
+          <a:p>
+            <a:pPr algn="just"/>
+            <a:r>
+              <a:rPr lang="en-US" sz="2200" dirty="0">
+                <a:latin typeface="Times New Roman" pitchFamily="18" charset="0"/>
+                <a:cs typeface="Times New Roman" pitchFamily="18" charset="0"/>
+              </a:rPr>
+              <a:t>	Data warehouses contain huge volumes of data. OLAP servers demand that decision support queries be answered in the order of seconds. Therefore, it is crucial for data warehouse systems to support highly efficient cube computation techniques, access methods, and query processing techniques.</a:t>
+            </a:r>
+          </a:p>
+          <a:p>
+            <a:pPr algn="just"/>
+            <a:endParaRPr lang="en-US" sz="2200" dirty="0">
+              <a:latin typeface="Times New Roman" pitchFamily="18" charset="0"/>
+              <a:cs typeface="Times New Roman" pitchFamily="18" charset="0"/>
+            </a:endParaRPr>
+          </a:p>
+          <a:p>
+            <a:pPr algn="just"/>
+            <a:r>
+              <a:rPr lang="en-US" sz="2200" b="1" dirty="0">
+                <a:latin typeface="Times New Roman" pitchFamily="18" charset="0"/>
+                <a:cs typeface="Times New Roman" pitchFamily="18" charset="0"/>
+              </a:rPr>
+              <a:t>Efficient Data Cube Computation: An Overview</a:t>
+            </a:r>
+          </a:p>
+          <a:p>
+            <a:pPr algn="just"/>
+            <a:r>
+              <a:rPr lang="en-US" dirty="0"/>
+              <a:t>	</a:t>
+            </a:r>
+            <a:r>
+              <a:rPr lang="en-US" sz="2200" dirty="0">
+                <a:latin typeface="Times New Roman" pitchFamily="18" charset="0"/>
+                <a:cs typeface="Times New Roman" pitchFamily="18" charset="0"/>
+              </a:rPr>
+              <a:t>Multidimensional data analysis is the efficient computation of aggregations across many sets of dimensions. In SQL terms, these aggregations are referred to as group-</a:t>
+            </a:r>
+            <a:r>
+              <a:rPr lang="en-US" sz="2200" dirty="0" err="1">
+                <a:latin typeface="Times New Roman" pitchFamily="18" charset="0"/>
+                <a:cs typeface="Times New Roman" pitchFamily="18" charset="0"/>
+              </a:rPr>
+              <a:t>by’s</a:t>
+            </a:r>
+            <a:r>
+              <a:rPr lang="en-US" sz="2200" dirty="0">
+                <a:latin typeface="Times New Roman" pitchFamily="18" charset="0"/>
+                <a:cs typeface="Times New Roman" pitchFamily="18" charset="0"/>
+              </a:rPr>
+              <a:t>. Each group-by can be represented by a cuboid, where the set of group-</a:t>
+            </a:r>
+            <a:r>
+              <a:rPr lang="en-US" sz="2200" dirty="0" err="1">
+                <a:latin typeface="Times New Roman" pitchFamily="18" charset="0"/>
+                <a:cs typeface="Times New Roman" pitchFamily="18" charset="0"/>
+              </a:rPr>
+              <a:t>by’s</a:t>
+            </a:r>
+            <a:r>
+              <a:rPr lang="en-US" sz="2200" dirty="0">
+                <a:latin typeface="Times New Roman" pitchFamily="18" charset="0"/>
+                <a:cs typeface="Times New Roman" pitchFamily="18" charset="0"/>
+              </a:rPr>
+              <a:t> forms a lattice of cuboids defining a data cube. The issues relating to the efficient computation of data cubes are:</a:t>
+            </a:r>
+          </a:p>
+          <a:p>
+            <a:pPr algn="just"/>
+            <a:endParaRPr lang="en-US" sz="2200" dirty="0">
+              <a:latin typeface="Times New Roman" pitchFamily="18" charset="0"/>
+              <a:cs typeface="Times New Roman" pitchFamily="18" charset="0"/>
+            </a:endParaRPr>
+          </a:p>
+          <a:p>
+            <a:pPr algn="just"/>
+            <a:r>
+              <a:rPr lang="en-US" sz="2200" b="1" dirty="0">
+                <a:solidFill>
+                  <a:srgbClr val="00B050"/>
+                </a:solidFill>
+                <a:latin typeface="Times New Roman" pitchFamily="18" charset="0"/>
+                <a:cs typeface="Times New Roman" pitchFamily="18" charset="0"/>
+              </a:rPr>
+              <a:t>The compute cube Operator and the Curse of Dimensionality:</a:t>
+            </a:r>
+          </a:p>
+          <a:p>
+            <a:pPr algn="just"/>
+            <a:r>
+              <a:rPr lang="en-US" sz="2200" dirty="0">
+                <a:latin typeface="Times New Roman" pitchFamily="18" charset="0"/>
+                <a:cs typeface="Times New Roman" pitchFamily="18" charset="0"/>
+              </a:rPr>
+              <a:t>	The compute cube operator computes aggregates over all subsets of the dimensions specified in the operation. This can require excessive storage space, especially for large numbers of dimensions.</a:t>
+            </a:r>
+            <a:endParaRPr lang="en-IN" sz="2200" dirty="0">
+              <a:latin typeface="Times New Roman" pitchFamily="18" charset="0"/>
+              <a:cs typeface="Times New Roman" pitchFamily="18" charset="0"/>
+            </a:endParaRPr>
+          </a:p>
+        </p:txBody>
+      </p:sp>
+    </p:spTree>
+    <p:extLst>
+      <p:ext uri="{BB962C8B-B14F-4D97-AF65-F5344CB8AC3E}">
+        <p14:creationId xmlns:p14="http://schemas.microsoft.com/office/powerpoint/2010/main" val="3094296480"/>
+      </p:ext>
+    </p:extLst>
+  </p:cSld>
+  <p:clrMapOvr>
+    <a:masterClrMapping/>
+  </p:clrMapOvr>
+</p:sld>
+</file>
+
+<file path=ppt/slides/slide52.xml><?xml version="1.0" encoding="utf-8"?>
+<p:sld xmlns:a="http://schemas.openxmlformats.org/drawingml/2006/main" xmlns:r="http://schemas.openxmlformats.org/officeDocument/2006/relationships" xmlns:p="http://schemas.openxmlformats.org/presentationml/2006/main">
+  <p:cSld>
+    <p:spTree>
+      <p:nvGrpSpPr>
+        <p:cNvPr id="1" name=""/>
+        <p:cNvGrpSpPr/>
+        <p:nvPr/>
+      </p:nvGrpSpPr>
+      <p:grpSpPr>
+        <a:xfrm>
+          <a:off x="0" y="0"/>
+          <a:ext cx="0" cy="0"/>
+          <a:chOff x="0" y="0"/>
+          <a:chExt cx="0" cy="0"/>
+        </a:xfrm>
+      </p:grpSpPr>
+      <p:sp>
+        <p:nvSpPr>
+          <p:cNvPr id="2" name="Rectangle 1"/>
+          <p:cNvSpPr/>
+          <p:nvPr/>
+        </p:nvSpPr>
+        <p:spPr>
+          <a:xfrm>
+            <a:off x="228600" y="152400"/>
+            <a:ext cx="8686800" cy="5509200"/>
+          </a:xfrm>
+          <a:prstGeom prst="rect">
+            <a:avLst/>
+          </a:prstGeom>
+        </p:spPr>
+        <p:txBody>
+          <a:bodyPr wrap="square">
+            <a:spAutoFit/>
+          </a:bodyPr>
+          <a:lstStyle/>
+          <a:p>
+            <a:pPr algn="just"/>
+            <a:r>
+              <a:rPr lang="en-US" sz="2200" b="1" dirty="0">
+                <a:latin typeface="Times New Roman" pitchFamily="18" charset="0"/>
+                <a:cs typeface="Times New Roman" pitchFamily="18" charset="0"/>
+              </a:rPr>
+              <a:t>Example:  </a:t>
+            </a:r>
+            <a:r>
+              <a:rPr lang="en-US" sz="2200" dirty="0">
+                <a:latin typeface="Times New Roman" pitchFamily="18" charset="0"/>
+                <a:cs typeface="Times New Roman" pitchFamily="18" charset="0"/>
+              </a:rPr>
+              <a:t>A data cube is a lattice of cuboids. Suppose that you want to create a data cube for </a:t>
+            </a:r>
+            <a:r>
+              <a:rPr lang="en-US" sz="2200" dirty="0" err="1">
+                <a:latin typeface="Times New Roman" pitchFamily="18" charset="0"/>
+                <a:cs typeface="Times New Roman" pitchFamily="18" charset="0"/>
+              </a:rPr>
+              <a:t>AllElectronics</a:t>
+            </a:r>
+            <a:r>
+              <a:rPr lang="en-US" sz="2200" dirty="0">
+                <a:latin typeface="Times New Roman" pitchFamily="18" charset="0"/>
+                <a:cs typeface="Times New Roman" pitchFamily="18" charset="0"/>
+              </a:rPr>
+              <a:t> sales that contains the following: city, item, year, and sales in dollars. You want to be able to analyze the data, with queries such as the following: </a:t>
+            </a:r>
+          </a:p>
+          <a:p>
+            <a:pPr marL="514350" indent="-514350" algn="just">
+              <a:buFont typeface="+mj-lt"/>
+              <a:buAutoNum type="romanLcPeriod"/>
+            </a:pPr>
+            <a:r>
+              <a:rPr lang="en-US" sz="2200" dirty="0">
+                <a:latin typeface="Times New Roman" pitchFamily="18" charset="0"/>
+                <a:cs typeface="Times New Roman" pitchFamily="18" charset="0"/>
+              </a:rPr>
+              <a:t>“Compute the sum of sales, grouping by city and item.” </a:t>
+            </a:r>
+          </a:p>
+          <a:p>
+            <a:pPr marL="514350" indent="-514350" algn="just">
+              <a:buFont typeface="+mj-lt"/>
+              <a:buAutoNum type="romanLcPeriod"/>
+            </a:pPr>
+            <a:r>
+              <a:rPr lang="en-US" sz="2200" dirty="0">
+                <a:latin typeface="Times New Roman" pitchFamily="18" charset="0"/>
+                <a:cs typeface="Times New Roman" pitchFamily="18" charset="0"/>
+              </a:rPr>
+              <a:t>“Compute the sum of sales, grouping by city.” </a:t>
+            </a:r>
+          </a:p>
+          <a:p>
+            <a:pPr marL="514350" indent="-514350" algn="just">
+              <a:buFont typeface="+mj-lt"/>
+              <a:buAutoNum type="romanLcPeriod"/>
+            </a:pPr>
+            <a:r>
+              <a:rPr lang="en-US" sz="2200" dirty="0">
+                <a:latin typeface="Times New Roman" pitchFamily="18" charset="0"/>
+                <a:cs typeface="Times New Roman" pitchFamily="18" charset="0"/>
+              </a:rPr>
+              <a:t>“Compute the sum of sales, grouping by item.”</a:t>
+            </a:r>
+          </a:p>
+          <a:p>
+            <a:pPr algn="just"/>
+            <a:endParaRPr lang="en-US" sz="2200" dirty="0">
+              <a:latin typeface="Times New Roman" pitchFamily="18" charset="0"/>
+              <a:cs typeface="Times New Roman" pitchFamily="18" charset="0"/>
+            </a:endParaRPr>
+          </a:p>
+          <a:p>
+            <a:pPr algn="just"/>
+            <a:r>
+              <a:rPr lang="en-US" sz="2200" dirty="0">
+                <a:latin typeface="Times New Roman" pitchFamily="18" charset="0"/>
+                <a:cs typeface="Times New Roman" pitchFamily="18" charset="0"/>
+              </a:rPr>
+              <a:t>Taking the three attributes, city, item, and year, as the dimensions for the data cube, and sales in dollars as the measure, the total number of cuboids, or group </a:t>
+            </a:r>
+            <a:r>
+              <a:rPr lang="en-US" sz="2200" dirty="0" err="1">
+                <a:latin typeface="Times New Roman" pitchFamily="18" charset="0"/>
+                <a:cs typeface="Times New Roman" pitchFamily="18" charset="0"/>
+              </a:rPr>
+              <a:t>by’s</a:t>
+            </a:r>
+            <a:r>
+              <a:rPr lang="en-US" sz="2200" dirty="0">
+                <a:latin typeface="Times New Roman" pitchFamily="18" charset="0"/>
+                <a:cs typeface="Times New Roman" pitchFamily="18" charset="0"/>
+              </a:rPr>
+              <a:t>, that can be computed for this data cube is 2</a:t>
+            </a:r>
+            <a:r>
+              <a:rPr lang="en-US" sz="2200" baseline="30000" dirty="0">
+                <a:latin typeface="Times New Roman" pitchFamily="18" charset="0"/>
+                <a:cs typeface="Times New Roman" pitchFamily="18" charset="0"/>
+              </a:rPr>
+              <a:t>3</a:t>
+            </a:r>
+            <a:r>
+              <a:rPr lang="en-US" sz="2200" dirty="0">
+                <a:latin typeface="Times New Roman" pitchFamily="18" charset="0"/>
+                <a:cs typeface="Times New Roman" pitchFamily="18" charset="0"/>
+              </a:rPr>
+              <a:t> = 8. </a:t>
+            </a:r>
+          </a:p>
+          <a:p>
+            <a:pPr algn="just"/>
+            <a:endParaRPr lang="en-US" sz="2200" dirty="0">
+              <a:latin typeface="Times New Roman" pitchFamily="18" charset="0"/>
+              <a:cs typeface="Times New Roman" pitchFamily="18" charset="0"/>
+            </a:endParaRPr>
+          </a:p>
+          <a:p>
+            <a:pPr algn="just"/>
+            <a:r>
+              <a:rPr lang="en-US" sz="2200" dirty="0">
+                <a:latin typeface="Times New Roman" pitchFamily="18" charset="0"/>
+                <a:cs typeface="Times New Roman" pitchFamily="18" charset="0"/>
+              </a:rPr>
+              <a:t>	The possible group-</a:t>
+            </a:r>
+            <a:r>
+              <a:rPr lang="en-US" sz="2200" dirty="0" err="1">
+                <a:latin typeface="Times New Roman" pitchFamily="18" charset="0"/>
+                <a:cs typeface="Times New Roman" pitchFamily="18" charset="0"/>
+              </a:rPr>
+              <a:t>by’s</a:t>
+            </a:r>
+            <a:r>
+              <a:rPr lang="en-US" sz="2200" dirty="0">
+                <a:latin typeface="Times New Roman" pitchFamily="18" charset="0"/>
+                <a:cs typeface="Times New Roman" pitchFamily="18" charset="0"/>
+              </a:rPr>
+              <a:t> are the following: {(city, item, year), (city, item), (city, year), (item, year), (city), (item), (year), ()} where () means that the group-by is empty. These group-</a:t>
+            </a:r>
+            <a:r>
+              <a:rPr lang="en-US" sz="2200" dirty="0" err="1">
+                <a:latin typeface="Times New Roman" pitchFamily="18" charset="0"/>
+                <a:cs typeface="Times New Roman" pitchFamily="18" charset="0"/>
+              </a:rPr>
+              <a:t>by’s</a:t>
+            </a:r>
+            <a:r>
+              <a:rPr lang="en-US" sz="2200" dirty="0">
+                <a:latin typeface="Times New Roman" pitchFamily="18" charset="0"/>
+                <a:cs typeface="Times New Roman" pitchFamily="18" charset="0"/>
+              </a:rPr>
+              <a:t> form a lattice of cuboids for the data cube, as shown in Figure.</a:t>
+            </a:r>
+          </a:p>
+        </p:txBody>
+      </p:sp>
+    </p:spTree>
+    <p:extLst>
+      <p:ext uri="{BB962C8B-B14F-4D97-AF65-F5344CB8AC3E}">
+        <p14:creationId xmlns:p14="http://schemas.microsoft.com/office/powerpoint/2010/main" val="1675867461"/>
+      </p:ext>
+    </p:extLst>
+  </p:cSld>
+  <p:clrMapOvr>
+    <a:masterClrMapping/>
+  </p:clrMapOvr>
+</p:sld>
+</file>
+
+<file path=ppt/slides/slide53.xml><?xml version="1.0" encoding="utf-8"?>
+<p:sld xmlns:a="http://schemas.openxmlformats.org/drawingml/2006/main" xmlns:r="http://schemas.openxmlformats.org/officeDocument/2006/relationships" xmlns:p="http://schemas.openxmlformats.org/presentationml/2006/main">
+  <p:cSld>
+    <p:spTree>
+      <p:nvGrpSpPr>
+        <p:cNvPr id="1" name=""/>
+        <p:cNvGrpSpPr/>
+        <p:nvPr/>
+      </p:nvGrpSpPr>
+      <p:grpSpPr>
+        <a:xfrm>
+          <a:off x="0" y="0"/>
+          <a:ext cx="0" cy="0"/>
+          <a:chOff x="0" y="0"/>
+          <a:chExt cx="0" cy="0"/>
+        </a:xfrm>
+      </p:grpSpPr>
       <p:pic>
         <p:nvPicPr>
           <p:cNvPr id="1026" name="Picture 2"/>
@@ -17725,7 +17986,7 @@
 </p:sld>
 </file>
 
-<file path=ppt/slides/slide51.xml><?xml version="1.0" encoding="utf-8"?>
+<file path=ppt/slides/slide54.xml><?xml version="1.0" encoding="utf-8"?>
 <p:sld xmlns:a="http://schemas.openxmlformats.org/drawingml/2006/main" xmlns:r="http://schemas.openxmlformats.org/officeDocument/2006/relationships" xmlns:p="http://schemas.openxmlformats.org/presentationml/2006/main">
   <p:cSld>
     <p:spTree>
@@ -17876,7 +18137,7 @@
 </p:sld>
 </file>
 
-<file path=ppt/slides/slide52.xml><?xml version="1.0" encoding="utf-8"?>
+<file path=ppt/slides/slide55.xml><?xml version="1.0" encoding="utf-8"?>
 <p:sld xmlns:a="http://schemas.openxmlformats.org/drawingml/2006/main" xmlns:r="http://schemas.openxmlformats.org/officeDocument/2006/relationships" xmlns:p="http://schemas.openxmlformats.org/presentationml/2006/main">
   <p:cSld>
     <p:spTree>
@@ -18140,7 +18401,7 @@
 </p:sld>
 </file>
 
-<file path=ppt/slides/slide53.xml><?xml version="1.0" encoding="utf-8"?>
+<file path=ppt/slides/slide56.xml><?xml version="1.0" encoding="utf-8"?>
 <p:sld xmlns:a="http://schemas.openxmlformats.org/drawingml/2006/main" xmlns:r="http://schemas.openxmlformats.org/officeDocument/2006/relationships" xmlns:p="http://schemas.openxmlformats.org/presentationml/2006/main">
   <p:cSld>
     <p:spTree>
@@ -18339,7 +18600,7 @@
 </p:sld>
 </file>
 
-<file path=ppt/slides/slide54.xml><?xml version="1.0" encoding="utf-8"?>
+<file path=ppt/slides/slide57.xml><?xml version="1.0" encoding="utf-8"?>
 <p:sld xmlns:a="http://schemas.openxmlformats.org/drawingml/2006/main" xmlns:r="http://schemas.openxmlformats.org/officeDocument/2006/relationships" xmlns:p="http://schemas.openxmlformats.org/presentationml/2006/main">
   <p:cSld>
     <p:spTree>
@@ -18563,7 +18824,7 @@
 </p:sld>
 </file>
 
-<file path=ppt/slides/slide55.xml><?xml version="1.0" encoding="utf-8"?>
+<file path=ppt/slides/slide58.xml><?xml version="1.0" encoding="utf-8"?>
 <p:sld xmlns:a="http://schemas.openxmlformats.org/drawingml/2006/main" xmlns:r="http://schemas.openxmlformats.org/officeDocument/2006/relationships" xmlns:p="http://schemas.openxmlformats.org/presentationml/2006/main">
   <p:cSld>
     <p:spTree>
@@ -18693,7 +18954,7 @@
 </p:sld>
 </file>
 
-<file path=ppt/slides/slide56.xml><?xml version="1.0" encoding="utf-8"?>
+<file path=ppt/slides/slide59.xml><?xml version="1.0" encoding="utf-8"?>
 <p:sld xmlns:a="http://schemas.openxmlformats.org/drawingml/2006/main" xmlns:r="http://schemas.openxmlformats.org/officeDocument/2006/relationships" xmlns:p="http://schemas.openxmlformats.org/presentationml/2006/main">
   <p:cSld>
     <p:spTree>
@@ -18947,7 +19208,316 @@
 </p:sld>
 </file>
 
-<file path=ppt/slides/slide57.xml><?xml version="1.0" encoding="utf-8"?>
+<file path=ppt/slides/slide6.xml><?xml version="1.0" encoding="utf-8"?>
+<p:sld xmlns:a="http://schemas.openxmlformats.org/drawingml/2006/main" xmlns:r="http://schemas.openxmlformats.org/officeDocument/2006/relationships" xmlns:p="http://schemas.openxmlformats.org/presentationml/2006/main">
+  <p:cSld>
+    <p:spTree>
+      <p:nvGrpSpPr>
+        <p:cNvPr id="1" name=""/>
+        <p:cNvGrpSpPr/>
+        <p:nvPr/>
+      </p:nvGrpSpPr>
+      <p:grpSpPr>
+        <a:xfrm>
+          <a:off x="0" y="0"/>
+          <a:ext cx="0" cy="0"/>
+          <a:chOff x="0" y="0"/>
+          <a:chExt cx="0" cy="0"/>
+        </a:xfrm>
+      </p:grpSpPr>
+      <p:sp>
+        <p:nvSpPr>
+          <p:cNvPr id="2" name="Rectangle 3"/>
+          <p:cNvSpPr txBox="1">
+            <a:spLocks noChangeArrowheads="1"/>
+          </p:cNvSpPr>
+          <p:nvPr/>
+        </p:nvSpPr>
+        <p:spPr>
+          <a:xfrm>
+            <a:off x="152400" y="76200"/>
+            <a:ext cx="8839200" cy="6553200"/>
+          </a:xfrm>
+          <a:prstGeom prst="rect">
+            <a:avLst/>
+          </a:prstGeom>
+        </p:spPr>
+        <p:txBody>
+          <a:bodyPr lIns="92075" tIns="46038" rIns="92075" bIns="46038"/>
+          <a:lstStyle>
+            <a:lvl1pPr marL="342900" indent="-342900" algn="l" defTabSz="914400" rtl="0" eaLnBrk="1" latinLnBrk="0" hangingPunct="1">
+              <a:spcBef>
+                <a:spcPct val="20000"/>
+              </a:spcBef>
+              <a:buFont typeface="Arial" pitchFamily="34" charset="0"/>
+              <a:buChar char="•"/>
+              <a:defRPr sz="3200" kern="1200">
+                <a:solidFill>
+                  <a:schemeClr val="tx1"/>
+                </a:solidFill>
+                <a:latin typeface="+mn-lt"/>
+                <a:ea typeface="+mn-ea"/>
+                <a:cs typeface="+mn-cs"/>
+              </a:defRPr>
+            </a:lvl1pPr>
+            <a:lvl2pPr marL="742950" indent="-285750" algn="l" defTabSz="914400" rtl="0" eaLnBrk="1" latinLnBrk="0" hangingPunct="1">
+              <a:spcBef>
+                <a:spcPct val="20000"/>
+              </a:spcBef>
+              <a:buFont typeface="Arial" pitchFamily="34" charset="0"/>
+              <a:buChar char="–"/>
+              <a:defRPr sz="2800" kern="1200">
+                <a:solidFill>
+                  <a:schemeClr val="tx1"/>
+                </a:solidFill>
+                <a:latin typeface="+mn-lt"/>
+                <a:ea typeface="+mn-ea"/>
+                <a:cs typeface="+mn-cs"/>
+              </a:defRPr>
+            </a:lvl2pPr>
+            <a:lvl3pPr marL="1143000" indent="-228600" algn="l" defTabSz="914400" rtl="0" eaLnBrk="1" latinLnBrk="0" hangingPunct="1">
+              <a:spcBef>
+                <a:spcPct val="20000"/>
+              </a:spcBef>
+              <a:buFont typeface="Arial" pitchFamily="34" charset="0"/>
+              <a:buChar char="•"/>
+              <a:defRPr sz="2400" kern="1200">
+                <a:solidFill>
+                  <a:schemeClr val="tx1"/>
+                </a:solidFill>
+                <a:latin typeface="+mn-lt"/>
+                <a:ea typeface="+mn-ea"/>
+                <a:cs typeface="+mn-cs"/>
+              </a:defRPr>
+            </a:lvl3pPr>
+            <a:lvl4pPr marL="1600200" indent="-228600" algn="l" defTabSz="914400" rtl="0" eaLnBrk="1" latinLnBrk="0" hangingPunct="1">
+              <a:spcBef>
+                <a:spcPct val="20000"/>
+              </a:spcBef>
+              <a:buFont typeface="Arial" pitchFamily="34" charset="0"/>
+              <a:buChar char="–"/>
+              <a:defRPr sz="2000" kern="1200">
+                <a:solidFill>
+                  <a:schemeClr val="tx1"/>
+                </a:solidFill>
+                <a:latin typeface="+mn-lt"/>
+                <a:ea typeface="+mn-ea"/>
+                <a:cs typeface="+mn-cs"/>
+              </a:defRPr>
+            </a:lvl4pPr>
+            <a:lvl5pPr marL="2057400" indent="-228600" algn="l" defTabSz="914400" rtl="0" eaLnBrk="1" latinLnBrk="0" hangingPunct="1">
+              <a:spcBef>
+                <a:spcPct val="20000"/>
+              </a:spcBef>
+              <a:buFont typeface="Arial" pitchFamily="34" charset="0"/>
+              <a:buChar char="»"/>
+              <a:defRPr sz="2000" kern="1200">
+                <a:solidFill>
+                  <a:schemeClr val="tx1"/>
+                </a:solidFill>
+                <a:latin typeface="+mn-lt"/>
+                <a:ea typeface="+mn-ea"/>
+                <a:cs typeface="+mn-cs"/>
+              </a:defRPr>
+            </a:lvl5pPr>
+            <a:lvl6pPr marL="2514600" indent="-228600" algn="l" defTabSz="914400" rtl="0" eaLnBrk="1" latinLnBrk="0" hangingPunct="1">
+              <a:spcBef>
+                <a:spcPct val="20000"/>
+              </a:spcBef>
+              <a:buFont typeface="Arial" pitchFamily="34" charset="0"/>
+              <a:buChar char="•"/>
+              <a:defRPr sz="2000" kern="1200">
+                <a:solidFill>
+                  <a:schemeClr val="tx1"/>
+                </a:solidFill>
+                <a:latin typeface="+mn-lt"/>
+                <a:ea typeface="+mn-ea"/>
+                <a:cs typeface="+mn-cs"/>
+              </a:defRPr>
+            </a:lvl6pPr>
+            <a:lvl7pPr marL="2971800" indent="-228600" algn="l" defTabSz="914400" rtl="0" eaLnBrk="1" latinLnBrk="0" hangingPunct="1">
+              <a:spcBef>
+                <a:spcPct val="20000"/>
+              </a:spcBef>
+              <a:buFont typeface="Arial" pitchFamily="34" charset="0"/>
+              <a:buChar char="•"/>
+              <a:defRPr sz="2000" kern="1200">
+                <a:solidFill>
+                  <a:schemeClr val="tx1"/>
+                </a:solidFill>
+                <a:latin typeface="+mn-lt"/>
+                <a:ea typeface="+mn-ea"/>
+                <a:cs typeface="+mn-cs"/>
+              </a:defRPr>
+            </a:lvl7pPr>
+            <a:lvl8pPr marL="3429000" indent="-228600" algn="l" defTabSz="914400" rtl="0" eaLnBrk="1" latinLnBrk="0" hangingPunct="1">
+              <a:spcBef>
+                <a:spcPct val="20000"/>
+              </a:spcBef>
+              <a:buFont typeface="Arial" pitchFamily="34" charset="0"/>
+              <a:buChar char="•"/>
+              <a:defRPr sz="2000" kern="1200">
+                <a:solidFill>
+                  <a:schemeClr val="tx1"/>
+                </a:solidFill>
+                <a:latin typeface="+mn-lt"/>
+                <a:ea typeface="+mn-ea"/>
+                <a:cs typeface="+mn-cs"/>
+              </a:defRPr>
+            </a:lvl8pPr>
+            <a:lvl9pPr marL="3886200" indent="-228600" algn="l" defTabSz="914400" rtl="0" eaLnBrk="1" latinLnBrk="0" hangingPunct="1">
+              <a:spcBef>
+                <a:spcPct val="20000"/>
+              </a:spcBef>
+              <a:buFont typeface="Arial" pitchFamily="34" charset="0"/>
+              <a:buChar char="•"/>
+              <a:defRPr sz="2000" kern="1200">
+                <a:solidFill>
+                  <a:schemeClr val="tx1"/>
+                </a:solidFill>
+                <a:latin typeface="+mn-lt"/>
+                <a:ea typeface="+mn-ea"/>
+                <a:cs typeface="+mn-cs"/>
+              </a:defRPr>
+            </a:lvl9pPr>
+          </a:lstStyle>
+          <a:p>
+            <a:pPr marL="0" indent="0" algn="just">
+              <a:lnSpc>
+                <a:spcPct val="130000"/>
+              </a:lnSpc>
+              <a:buNone/>
+            </a:pPr>
+            <a:r>
+              <a:rPr lang="en-US" sz="2200" b="1" dirty="0">
+                <a:latin typeface="Times New Roman" pitchFamily="18" charset="0"/>
+                <a:cs typeface="Times New Roman" pitchFamily="18" charset="0"/>
+              </a:rPr>
+              <a:t>Data Warehouse—</a:t>
+            </a:r>
+            <a:r>
+              <a:rPr lang="en-US" sz="2200" b="1" dirty="0">
+                <a:solidFill>
+                  <a:srgbClr val="FF0000"/>
+                </a:solidFill>
+                <a:latin typeface="Times New Roman" pitchFamily="18" charset="0"/>
+                <a:cs typeface="Times New Roman" pitchFamily="18" charset="0"/>
+              </a:rPr>
+              <a:t>Time Variant</a:t>
+            </a:r>
+          </a:p>
+          <a:p>
+            <a:pPr algn="just">
+              <a:lnSpc>
+                <a:spcPct val="120000"/>
+              </a:lnSpc>
+            </a:pPr>
+            <a:r>
+              <a:rPr lang="en-US" sz="2200" dirty="0">
+                <a:latin typeface="Times New Roman" pitchFamily="18" charset="0"/>
+                <a:cs typeface="Times New Roman" pitchFamily="18" charset="0"/>
+              </a:rPr>
+              <a:t>The time horizon for the data warehouse is significantly longer than that of operational systems</a:t>
+            </a:r>
+          </a:p>
+          <a:p>
+            <a:pPr lvl="1" algn="just">
+              <a:lnSpc>
+                <a:spcPct val="120000"/>
+              </a:lnSpc>
+            </a:pPr>
+            <a:r>
+              <a:rPr lang="en-US" sz="2200" dirty="0">
+                <a:latin typeface="Times New Roman" pitchFamily="18" charset="0"/>
+                <a:cs typeface="Times New Roman" pitchFamily="18" charset="0"/>
+              </a:rPr>
+              <a:t>Operational database: current value data</a:t>
+            </a:r>
+          </a:p>
+          <a:p>
+            <a:pPr lvl="1" algn="just">
+              <a:lnSpc>
+                <a:spcPct val="120000"/>
+              </a:lnSpc>
+            </a:pPr>
+            <a:r>
+              <a:rPr lang="en-US" sz="2200" dirty="0">
+                <a:latin typeface="Times New Roman" pitchFamily="18" charset="0"/>
+                <a:cs typeface="Times New Roman" pitchFamily="18" charset="0"/>
+              </a:rPr>
+              <a:t>Data warehouse data: provide information from a historical perspective (e.g., past 5-10 years)</a:t>
+            </a:r>
+          </a:p>
+          <a:p>
+            <a:pPr algn="just">
+              <a:lnSpc>
+                <a:spcPct val="120000"/>
+              </a:lnSpc>
+            </a:pPr>
+            <a:r>
+              <a:rPr lang="en-US" sz="2200" dirty="0">
+                <a:latin typeface="Times New Roman" pitchFamily="18" charset="0"/>
+                <a:cs typeface="Times New Roman" pitchFamily="18" charset="0"/>
+              </a:rPr>
+              <a:t>Every key structure in the data warehouse</a:t>
+            </a:r>
+          </a:p>
+          <a:p>
+            <a:pPr lvl="1" algn="just">
+              <a:lnSpc>
+                <a:spcPct val="120000"/>
+              </a:lnSpc>
+            </a:pPr>
+            <a:r>
+              <a:rPr lang="en-US" sz="2200" dirty="0">
+                <a:latin typeface="Times New Roman" pitchFamily="18" charset="0"/>
+                <a:cs typeface="Times New Roman" pitchFamily="18" charset="0"/>
+              </a:rPr>
+              <a:t>Contains an element of time, explicitly or implicitly</a:t>
+            </a:r>
+          </a:p>
+          <a:p>
+            <a:pPr lvl="1" algn="just">
+              <a:lnSpc>
+                <a:spcPct val="120000"/>
+              </a:lnSpc>
+            </a:pPr>
+            <a:r>
+              <a:rPr lang="en-US" sz="2200" dirty="0">
+                <a:latin typeface="Times New Roman" pitchFamily="18" charset="0"/>
+                <a:cs typeface="Times New Roman" pitchFamily="18" charset="0"/>
+              </a:rPr>
+              <a:t>But the key of operational data may or may not contain “time element”</a:t>
+            </a:r>
+          </a:p>
+          <a:p>
+            <a:pPr marL="0" indent="0" algn="just">
+              <a:lnSpc>
+                <a:spcPct val="130000"/>
+              </a:lnSpc>
+              <a:buNone/>
+            </a:pPr>
+            <a:endParaRPr lang="en-US" sz="2000" dirty="0">
+              <a:latin typeface="Times New Roman" pitchFamily="18" charset="0"/>
+              <a:cs typeface="Times New Roman" pitchFamily="18" charset="0"/>
+            </a:endParaRPr>
+          </a:p>
+        </p:txBody>
+      </p:sp>
+    </p:spTree>
+    <p:extLst>
+      <p:ext uri="{BB962C8B-B14F-4D97-AF65-F5344CB8AC3E}">
+        <p14:creationId xmlns:p14="http://schemas.microsoft.com/office/powerpoint/2010/main" val="493592279"/>
+      </p:ext>
+    </p:extLst>
+  </p:cSld>
+  <p:clrMapOvr>
+    <a:masterClrMapping/>
+  </p:clrMapOvr>
+</p:sld>
+</file>
+
+<file path=ppt/slides/slide60.xml><?xml version="1.0" encoding="utf-8"?>
 <p:sld xmlns:a="http://schemas.openxmlformats.org/drawingml/2006/main" xmlns:r="http://schemas.openxmlformats.org/officeDocument/2006/relationships" xmlns:p="http://schemas.openxmlformats.org/presentationml/2006/main">
   <p:cSld>
     <p:spTree>
@@ -19044,7 +19614,7 @@
 </p:sld>
 </file>
 
-<file path=ppt/slides/slide58.xml><?xml version="1.0" encoding="utf-8"?>
+<file path=ppt/slides/slide61.xml><?xml version="1.0" encoding="utf-8"?>
 <p:sld xmlns:a="http://schemas.openxmlformats.org/drawingml/2006/main" xmlns:r="http://schemas.openxmlformats.org/officeDocument/2006/relationships" xmlns:p="http://schemas.openxmlformats.org/presentationml/2006/main">
   <p:cSld>
     <p:spTree>
@@ -19202,7 +19772,7 @@
 </p:sld>
 </file>
 
-<file path=ppt/slides/slide59.xml><?xml version="1.0" encoding="utf-8"?>
+<file path=ppt/slides/slide62.xml><?xml version="1.0" encoding="utf-8"?>
 <p:sld xmlns:a="http://schemas.openxmlformats.org/drawingml/2006/main" xmlns:r="http://schemas.openxmlformats.org/officeDocument/2006/relationships" xmlns:p="http://schemas.openxmlformats.org/presentationml/2006/main">
   <p:cSld>
     <p:spTree>
@@ -19381,316 +19951,7 @@
 </p:sld>
 </file>
 
-<file path=ppt/slides/slide6.xml><?xml version="1.0" encoding="utf-8"?>
-<p:sld xmlns:a="http://schemas.openxmlformats.org/drawingml/2006/main" xmlns:r="http://schemas.openxmlformats.org/officeDocument/2006/relationships" xmlns:p="http://schemas.openxmlformats.org/presentationml/2006/main">
-  <p:cSld>
-    <p:spTree>
-      <p:nvGrpSpPr>
-        <p:cNvPr id="1" name=""/>
-        <p:cNvGrpSpPr/>
-        <p:nvPr/>
-      </p:nvGrpSpPr>
-      <p:grpSpPr>
-        <a:xfrm>
-          <a:off x="0" y="0"/>
-          <a:ext cx="0" cy="0"/>
-          <a:chOff x="0" y="0"/>
-          <a:chExt cx="0" cy="0"/>
-        </a:xfrm>
-      </p:grpSpPr>
-      <p:sp>
-        <p:nvSpPr>
-          <p:cNvPr id="2" name="Rectangle 3"/>
-          <p:cNvSpPr txBox="1">
-            <a:spLocks noChangeArrowheads="1"/>
-          </p:cNvSpPr>
-          <p:nvPr/>
-        </p:nvSpPr>
-        <p:spPr>
-          <a:xfrm>
-            <a:off x="152400" y="76200"/>
-            <a:ext cx="8839200" cy="6553200"/>
-          </a:xfrm>
-          <a:prstGeom prst="rect">
-            <a:avLst/>
-          </a:prstGeom>
-        </p:spPr>
-        <p:txBody>
-          <a:bodyPr lIns="92075" tIns="46038" rIns="92075" bIns="46038"/>
-          <a:lstStyle>
-            <a:lvl1pPr marL="342900" indent="-342900" algn="l" defTabSz="914400" rtl="0" eaLnBrk="1" latinLnBrk="0" hangingPunct="1">
-              <a:spcBef>
-                <a:spcPct val="20000"/>
-              </a:spcBef>
-              <a:buFont typeface="Arial" pitchFamily="34" charset="0"/>
-              <a:buChar char="•"/>
-              <a:defRPr sz="3200" kern="1200">
-                <a:solidFill>
-                  <a:schemeClr val="tx1"/>
-                </a:solidFill>
-                <a:latin typeface="+mn-lt"/>
-                <a:ea typeface="+mn-ea"/>
-                <a:cs typeface="+mn-cs"/>
-              </a:defRPr>
-            </a:lvl1pPr>
-            <a:lvl2pPr marL="742950" indent="-285750" algn="l" defTabSz="914400" rtl="0" eaLnBrk="1" latinLnBrk="0" hangingPunct="1">
-              <a:spcBef>
-                <a:spcPct val="20000"/>
-              </a:spcBef>
-              <a:buFont typeface="Arial" pitchFamily="34" charset="0"/>
-              <a:buChar char="–"/>
-              <a:defRPr sz="2800" kern="1200">
-                <a:solidFill>
-                  <a:schemeClr val="tx1"/>
-                </a:solidFill>
-                <a:latin typeface="+mn-lt"/>
-                <a:ea typeface="+mn-ea"/>
-                <a:cs typeface="+mn-cs"/>
-              </a:defRPr>
-            </a:lvl2pPr>
-            <a:lvl3pPr marL="1143000" indent="-228600" algn="l" defTabSz="914400" rtl="0" eaLnBrk="1" latinLnBrk="0" hangingPunct="1">
-              <a:spcBef>
-                <a:spcPct val="20000"/>
-              </a:spcBef>
-              <a:buFont typeface="Arial" pitchFamily="34" charset="0"/>
-              <a:buChar char="•"/>
-              <a:defRPr sz="2400" kern="1200">
-                <a:solidFill>
-                  <a:schemeClr val="tx1"/>
-                </a:solidFill>
-                <a:latin typeface="+mn-lt"/>
-                <a:ea typeface="+mn-ea"/>
-                <a:cs typeface="+mn-cs"/>
-              </a:defRPr>
-            </a:lvl3pPr>
-            <a:lvl4pPr marL="1600200" indent="-228600" algn="l" defTabSz="914400" rtl="0" eaLnBrk="1" latinLnBrk="0" hangingPunct="1">
-              <a:spcBef>
-                <a:spcPct val="20000"/>
-              </a:spcBef>
-              <a:buFont typeface="Arial" pitchFamily="34" charset="0"/>
-              <a:buChar char="–"/>
-              <a:defRPr sz="2000" kern="1200">
-                <a:solidFill>
-                  <a:schemeClr val="tx1"/>
-                </a:solidFill>
-                <a:latin typeface="+mn-lt"/>
-                <a:ea typeface="+mn-ea"/>
-                <a:cs typeface="+mn-cs"/>
-              </a:defRPr>
-            </a:lvl4pPr>
-            <a:lvl5pPr marL="2057400" indent="-228600" algn="l" defTabSz="914400" rtl="0" eaLnBrk="1" latinLnBrk="0" hangingPunct="1">
-              <a:spcBef>
-                <a:spcPct val="20000"/>
-              </a:spcBef>
-              <a:buFont typeface="Arial" pitchFamily="34" charset="0"/>
-              <a:buChar char="»"/>
-              <a:defRPr sz="2000" kern="1200">
-                <a:solidFill>
-                  <a:schemeClr val="tx1"/>
-                </a:solidFill>
-                <a:latin typeface="+mn-lt"/>
-                <a:ea typeface="+mn-ea"/>
-                <a:cs typeface="+mn-cs"/>
-              </a:defRPr>
-            </a:lvl5pPr>
-            <a:lvl6pPr marL="2514600" indent="-228600" algn="l" defTabSz="914400" rtl="0" eaLnBrk="1" latinLnBrk="0" hangingPunct="1">
-              <a:spcBef>
-                <a:spcPct val="20000"/>
-              </a:spcBef>
-              <a:buFont typeface="Arial" pitchFamily="34" charset="0"/>
-              <a:buChar char="•"/>
-              <a:defRPr sz="2000" kern="1200">
-                <a:solidFill>
-                  <a:schemeClr val="tx1"/>
-                </a:solidFill>
-                <a:latin typeface="+mn-lt"/>
-                <a:ea typeface="+mn-ea"/>
-                <a:cs typeface="+mn-cs"/>
-              </a:defRPr>
-            </a:lvl6pPr>
-            <a:lvl7pPr marL="2971800" indent="-228600" algn="l" defTabSz="914400" rtl="0" eaLnBrk="1" latinLnBrk="0" hangingPunct="1">
-              <a:spcBef>
-                <a:spcPct val="20000"/>
-              </a:spcBef>
-              <a:buFont typeface="Arial" pitchFamily="34" charset="0"/>
-              <a:buChar char="•"/>
-              <a:defRPr sz="2000" kern="1200">
-                <a:solidFill>
-                  <a:schemeClr val="tx1"/>
-                </a:solidFill>
-                <a:latin typeface="+mn-lt"/>
-                <a:ea typeface="+mn-ea"/>
-                <a:cs typeface="+mn-cs"/>
-              </a:defRPr>
-            </a:lvl7pPr>
-            <a:lvl8pPr marL="3429000" indent="-228600" algn="l" defTabSz="914400" rtl="0" eaLnBrk="1" latinLnBrk="0" hangingPunct="1">
-              <a:spcBef>
-                <a:spcPct val="20000"/>
-              </a:spcBef>
-              <a:buFont typeface="Arial" pitchFamily="34" charset="0"/>
-              <a:buChar char="•"/>
-              <a:defRPr sz="2000" kern="1200">
-                <a:solidFill>
-                  <a:schemeClr val="tx1"/>
-                </a:solidFill>
-                <a:latin typeface="+mn-lt"/>
-                <a:ea typeface="+mn-ea"/>
-                <a:cs typeface="+mn-cs"/>
-              </a:defRPr>
-            </a:lvl8pPr>
-            <a:lvl9pPr marL="3886200" indent="-228600" algn="l" defTabSz="914400" rtl="0" eaLnBrk="1" latinLnBrk="0" hangingPunct="1">
-              <a:spcBef>
-                <a:spcPct val="20000"/>
-              </a:spcBef>
-              <a:buFont typeface="Arial" pitchFamily="34" charset="0"/>
-              <a:buChar char="•"/>
-              <a:defRPr sz="2000" kern="1200">
-                <a:solidFill>
-                  <a:schemeClr val="tx1"/>
-                </a:solidFill>
-                <a:latin typeface="+mn-lt"/>
-                <a:ea typeface="+mn-ea"/>
-                <a:cs typeface="+mn-cs"/>
-              </a:defRPr>
-            </a:lvl9pPr>
-          </a:lstStyle>
-          <a:p>
-            <a:pPr marL="0" indent="0" algn="just">
-              <a:lnSpc>
-                <a:spcPct val="130000"/>
-              </a:lnSpc>
-              <a:buNone/>
-            </a:pPr>
-            <a:r>
-              <a:rPr lang="en-US" sz="2200" b="1" dirty="0">
-                <a:latin typeface="Times New Roman" pitchFamily="18" charset="0"/>
-                <a:cs typeface="Times New Roman" pitchFamily="18" charset="0"/>
-              </a:rPr>
-              <a:t>Data Warehouse—</a:t>
-            </a:r>
-            <a:r>
-              <a:rPr lang="en-US" sz="2200" b="1" dirty="0">
-                <a:solidFill>
-                  <a:srgbClr val="FF0000"/>
-                </a:solidFill>
-                <a:latin typeface="Times New Roman" pitchFamily="18" charset="0"/>
-                <a:cs typeface="Times New Roman" pitchFamily="18" charset="0"/>
-              </a:rPr>
-              <a:t>Time Variant</a:t>
-            </a:r>
-          </a:p>
-          <a:p>
-            <a:pPr algn="just">
-              <a:lnSpc>
-                <a:spcPct val="120000"/>
-              </a:lnSpc>
-            </a:pPr>
-            <a:r>
-              <a:rPr lang="en-US" sz="2200" dirty="0">
-                <a:latin typeface="Times New Roman" pitchFamily="18" charset="0"/>
-                <a:cs typeface="Times New Roman" pitchFamily="18" charset="0"/>
-              </a:rPr>
-              <a:t>The time horizon for the data warehouse is significantly longer than that of operational systems</a:t>
-            </a:r>
-          </a:p>
-          <a:p>
-            <a:pPr lvl="1" algn="just">
-              <a:lnSpc>
-                <a:spcPct val="120000"/>
-              </a:lnSpc>
-            </a:pPr>
-            <a:r>
-              <a:rPr lang="en-US" sz="2200" dirty="0">
-                <a:latin typeface="Times New Roman" pitchFamily="18" charset="0"/>
-                <a:cs typeface="Times New Roman" pitchFamily="18" charset="0"/>
-              </a:rPr>
-              <a:t>Operational database: current value data</a:t>
-            </a:r>
-          </a:p>
-          <a:p>
-            <a:pPr lvl="1" algn="just">
-              <a:lnSpc>
-                <a:spcPct val="120000"/>
-              </a:lnSpc>
-            </a:pPr>
-            <a:r>
-              <a:rPr lang="en-US" sz="2200" dirty="0">
-                <a:latin typeface="Times New Roman" pitchFamily="18" charset="0"/>
-                <a:cs typeface="Times New Roman" pitchFamily="18" charset="0"/>
-              </a:rPr>
-              <a:t>Data warehouse data: provide information from a historical perspective (e.g., past 5-10 years)</a:t>
-            </a:r>
-          </a:p>
-          <a:p>
-            <a:pPr algn="just">
-              <a:lnSpc>
-                <a:spcPct val="120000"/>
-              </a:lnSpc>
-            </a:pPr>
-            <a:r>
-              <a:rPr lang="en-US" sz="2200" dirty="0">
-                <a:latin typeface="Times New Roman" pitchFamily="18" charset="0"/>
-                <a:cs typeface="Times New Roman" pitchFamily="18" charset="0"/>
-              </a:rPr>
-              <a:t>Every key structure in the data warehouse</a:t>
-            </a:r>
-          </a:p>
-          <a:p>
-            <a:pPr lvl="1" algn="just">
-              <a:lnSpc>
-                <a:spcPct val="120000"/>
-              </a:lnSpc>
-            </a:pPr>
-            <a:r>
-              <a:rPr lang="en-US" sz="2200" dirty="0">
-                <a:latin typeface="Times New Roman" pitchFamily="18" charset="0"/>
-                <a:cs typeface="Times New Roman" pitchFamily="18" charset="0"/>
-              </a:rPr>
-              <a:t>Contains an element of time, explicitly or implicitly</a:t>
-            </a:r>
-          </a:p>
-          <a:p>
-            <a:pPr lvl="1" algn="just">
-              <a:lnSpc>
-                <a:spcPct val="120000"/>
-              </a:lnSpc>
-            </a:pPr>
-            <a:r>
-              <a:rPr lang="en-US" sz="2200" dirty="0">
-                <a:latin typeface="Times New Roman" pitchFamily="18" charset="0"/>
-                <a:cs typeface="Times New Roman" pitchFamily="18" charset="0"/>
-              </a:rPr>
-              <a:t>But the key of operational data may or may not contain “time element”</a:t>
-            </a:r>
-          </a:p>
-          <a:p>
-            <a:pPr marL="0" indent="0" algn="just">
-              <a:lnSpc>
-                <a:spcPct val="130000"/>
-              </a:lnSpc>
-              <a:buNone/>
-            </a:pPr>
-            <a:endParaRPr lang="en-US" sz="2000" dirty="0">
-              <a:latin typeface="Times New Roman" pitchFamily="18" charset="0"/>
-              <a:cs typeface="Times New Roman" pitchFamily="18" charset="0"/>
-            </a:endParaRPr>
-          </a:p>
-        </p:txBody>
-      </p:sp>
-    </p:spTree>
-    <p:extLst>
-      <p:ext uri="{BB962C8B-B14F-4D97-AF65-F5344CB8AC3E}">
-        <p14:creationId xmlns:p14="http://schemas.microsoft.com/office/powerpoint/2010/main" val="493592279"/>
-      </p:ext>
-    </p:extLst>
-  </p:cSld>
-  <p:clrMapOvr>
-    <a:masterClrMapping/>
-  </p:clrMapOvr>
-</p:sld>
-</file>
-
-<file path=ppt/slides/slide60.xml><?xml version="1.0" encoding="utf-8"?>
+<file path=ppt/slides/slide63.xml><?xml version="1.0" encoding="utf-8"?>
 <p:sld xmlns:a="http://schemas.openxmlformats.org/drawingml/2006/main" xmlns:r="http://schemas.openxmlformats.org/officeDocument/2006/relationships" xmlns:p="http://schemas.openxmlformats.org/presentationml/2006/main">
   <p:cSld>
     <p:spTree>
@@ -19825,7 +20086,7 @@
 </p:sld>
 </file>
 
-<file path=ppt/slides/slide61.xml><?xml version="1.0" encoding="utf-8"?>
+<file path=ppt/slides/slide64.xml><?xml version="1.0" encoding="utf-8"?>
 <p:sld xmlns:a="http://schemas.openxmlformats.org/drawingml/2006/main" xmlns:r="http://schemas.openxmlformats.org/officeDocument/2006/relationships" xmlns:p="http://schemas.openxmlformats.org/presentationml/2006/main">
   <p:cSld>
     <p:spTree>
@@ -19963,7 +20224,7 @@
 </p:sld>
 </file>
 
-<file path=ppt/slides/slide62.xml><?xml version="1.0" encoding="utf-8"?>
+<file path=ppt/slides/slide65.xml><?xml version="1.0" encoding="utf-8"?>
 <p:sld xmlns:a="http://schemas.openxmlformats.org/drawingml/2006/main" xmlns:r="http://schemas.openxmlformats.org/officeDocument/2006/relationships" xmlns:p="http://schemas.openxmlformats.org/presentationml/2006/main">
   <p:cSld>
     <p:spTree>
@@ -21506,7 +21767,41 @@
                 <a:latin typeface="Times New Roman" pitchFamily="18" charset="0"/>
                 <a:cs typeface="Times New Roman" pitchFamily="18" charset="0"/>
               </a:rPr>
-              <a:t>An OLTP system is customer-oriented and is used for transaction and query processing by clerks, clients, and information technology professionals. An OLAP system is market-oriented and is used for data analysis by knowledge workers, including managers, executives, and analysts.</a:t>
+              <a:t>An OLTP </a:t>
+            </a:r>
+            <a:r>
+              <a:rPr lang="en-US" sz="2200" dirty="0">
+                <a:highlight>
+                  <a:srgbClr val="FFFF00"/>
+                </a:highlight>
+                <a:latin typeface="Times New Roman" pitchFamily="18" charset="0"/>
+                <a:cs typeface="Times New Roman" pitchFamily="18" charset="0"/>
+              </a:rPr>
+              <a:t>system is customer-oriented and is used for transaction </a:t>
+            </a:r>
+            <a:r>
+              <a:rPr lang="en-US" sz="2200" dirty="0">
+                <a:latin typeface="Times New Roman" pitchFamily="18" charset="0"/>
+                <a:cs typeface="Times New Roman" pitchFamily="18" charset="0"/>
+              </a:rPr>
+              <a:t>and query processing by clerks, clients, and information technology professionals. An </a:t>
+            </a:r>
+            <a:r>
+              <a:rPr lang="en-US" sz="2200" dirty="0">
+                <a:highlight>
+                  <a:srgbClr val="FFFF00"/>
+                </a:highlight>
+                <a:latin typeface="Times New Roman" pitchFamily="18" charset="0"/>
+                <a:cs typeface="Times New Roman" pitchFamily="18" charset="0"/>
+              </a:rPr>
+              <a:t>OLAP system is market-oriented and is used for data analysis</a:t>
+            </a:r>
+            <a:r>
+              <a:rPr lang="en-US" sz="2200" dirty="0">
+                <a:latin typeface="Times New Roman" pitchFamily="18" charset="0"/>
+                <a:cs typeface="Times New Roman" pitchFamily="18" charset="0"/>
+              </a:rPr>
+              <a:t> by knowledge workers, including managers, executives, and analysts.</a:t>
             </a:r>
           </a:p>
         </p:txBody>
